--- a/aulas/aula-04-privacidade-linddun.pptx
+++ b/aulas/aula-04-privacidade-linddun.pptx
@@ -6,15 +6,16 @@
   </p:sldMasterIdLst>
   <p:sldIdLst>
     <p:sldId id="256" r:id="rId7"/>
-    <p:sldId id="257" r:id="rId8"/>
-    <p:sldId id="258" r:id="rId9"/>
-    <p:sldId id="259" r:id="rId10"/>
-    <p:sldId id="260" r:id="rId11"/>
-    <p:sldId id="261" r:id="rId12"/>
-    <p:sldId id="262" r:id="rId13"/>
-    <p:sldId id="263" r:id="rId14"/>
-    <p:sldId id="264" r:id="rId15"/>
-    <p:sldId id="265" r:id="rId16"/>
+    <p:sldId id="257" r:id="rId9"/>
+    <p:sldId id="258" r:id="rId10"/>
+    <p:sldId id="259" r:id="rId11"/>
+    <p:sldId id="260" r:id="rId12"/>
+    <p:sldId id="261" r:id="rId13"/>
+    <p:sldId id="262" r:id="rId14"/>
+    <p:sldId id="263" r:id="rId15"/>
+    <p:sldId id="264" r:id="rId16"/>
+    <p:sldId id="265" r:id="rId17"/>
+    <p:sldId id="266" r:id="rId18"/>
   </p:sldIdLst>
   <p:sldSz cx="12191695" cy="6858000" type="screen4x3"/>
   <p:notesSz cx="6858000" cy="9144000"/>
@@ -114,6 +115,846 @@
     </a:lvl9pPr>
   </p:defaultTextStyle>
 </p:presentation>
+</file>
+
+<file path=ppt/notesMasters/notesMaster1.xml><?xml version="1.0" encoding="utf-8"?>
+<p:notesMaster xmlns:a="http://schemas.openxmlformats.org/drawingml/2006/main" xmlns:p="http://schemas.openxmlformats.org/presentationml/2006/main" xmlns:r="http://schemas.openxmlformats.org/officeDocument/2006/relationships">
+  <p:cSld>
+    <p:bg>
+      <p:bgRef idx="1001">
+        <a:schemeClr val="bg1"/>
+      </p:bgRef>
+    </p:bg>
+    <p:spTree>
+      <p:nvGrpSpPr>
+        <p:cNvPr id="1" name=""/>
+        <p:cNvGrpSpPr/>
+        <p:nvPr/>
+      </p:nvGrpSpPr>
+      <p:grpSpPr>
+        <a:xfrm>
+          <a:off x="0" y="0"/>
+          <a:ext cx="0" cy="0"/>
+          <a:chOff x="0" y="0"/>
+          <a:chExt cx="0" cy="0"/>
+        </a:xfrm>
+      </p:grpSpPr>
+      <p:sp>
+        <p:nvSpPr>
+          <p:cNvPr id="2" name="Header Placeholder 1"/>
+          <p:cNvSpPr>
+            <a:spLocks noGrp="1"/>
+          </p:cNvSpPr>
+          <p:nvPr>
+            <p:ph type="hdr" sz="quarter"/>
+          </p:nvPr>
+        </p:nvSpPr>
+        <p:spPr>
+          <a:xfrm>
+            <a:off x="0" y="0"/>
+            <a:ext cx="2971800" cy="457200"/>
+          </a:xfrm>
+          <a:prstGeom prst="rect">
+            <a:avLst/>
+          </a:prstGeom>
+        </p:spPr>
+        <p:txBody>
+          <a:bodyPr vert="horz" lIns="91440" tIns="45720" rIns="91440" bIns="45720" rtlCol="0"/>
+          <a:lstStyle>
+            <a:lvl1pPr algn="l">
+              <a:defRPr sz="1200"/>
+            </a:lvl1pPr>
+          </a:lstStyle>
+          <a:p>
+            <a:endParaRPr lang="en-US"/>
+          </a:p>
+        </p:txBody>
+      </p:sp>
+      <p:sp>
+        <p:nvSpPr>
+          <p:cNvPr id="3" name="Date Placeholder 2"/>
+          <p:cNvSpPr>
+            <a:spLocks noGrp="1"/>
+          </p:cNvSpPr>
+          <p:nvPr>
+            <p:ph type="dt" idx="1"/>
+          </p:nvPr>
+        </p:nvSpPr>
+        <p:spPr>
+          <a:xfrm>
+            <a:off x="3884613" y="0"/>
+            <a:ext cx="2971800" cy="457200"/>
+          </a:xfrm>
+          <a:prstGeom prst="rect">
+            <a:avLst/>
+          </a:prstGeom>
+        </p:spPr>
+        <p:txBody>
+          <a:bodyPr vert="horz" lIns="91440" tIns="45720" rIns="91440" bIns="45720" rtlCol="0"/>
+          <a:lstStyle>
+            <a:lvl1pPr algn="r">
+              <a:defRPr sz="1200"/>
+            </a:lvl1pPr>
+          </a:lstStyle>
+          <a:p>
+            <a:fld id="{0F89C1C7-3DCD-1040-A9CF-14679D8B5DDD}" type="datetimeFigureOut">
+              <a:rPr lang="en-US" smtClean="0"/>
+              <a:t>10/17/16</a:t>
+            </a:fld>
+            <a:endParaRPr lang="en-US"/>
+          </a:p>
+        </p:txBody>
+      </p:sp>
+      <p:sp>
+        <p:nvSpPr>
+          <p:cNvPr id="4" name="Slide Image Placeholder 3"/>
+          <p:cNvSpPr>
+            <a:spLocks noGrp="1" noRot="1" noChangeAspect="1"/>
+          </p:cNvSpPr>
+          <p:nvPr>
+            <p:ph type="sldImg" idx="2"/>
+          </p:nvPr>
+        </p:nvSpPr>
+        <p:spPr>
+          <a:xfrm>
+            <a:off x="1143000" y="685800"/>
+            <a:ext cx="4572000" cy="3429000"/>
+          </a:xfrm>
+          <a:prstGeom prst="rect">
+            <a:avLst/>
+          </a:prstGeom>
+          <a:noFill/>
+          <a:ln w="12700">
+            <a:solidFill>
+              <a:prstClr val="black"/>
+            </a:solidFill>
+          </a:ln>
+        </p:spPr>
+        <p:txBody>
+          <a:bodyPr vert="horz" lIns="91440" tIns="45720" rIns="91440" bIns="45720" rtlCol="0" anchor="ctr"/>
+          <a:lstStyle/>
+          <a:p>
+            <a:endParaRPr lang="en-US"/>
+          </a:p>
+        </p:txBody>
+      </p:sp>
+      <p:sp>
+        <p:nvSpPr>
+          <p:cNvPr id="5" name="Notes Placeholder 4"/>
+          <p:cNvSpPr>
+            <a:spLocks noGrp="1"/>
+          </p:cNvSpPr>
+          <p:nvPr>
+            <p:ph type="body" sz="quarter" idx="3"/>
+          </p:nvPr>
+        </p:nvSpPr>
+        <p:spPr>
+          <a:xfrm>
+            <a:off x="685800" y="4343400"/>
+            <a:ext cx="5486400" cy="4114800"/>
+          </a:xfrm>
+          <a:prstGeom prst="rect">
+            <a:avLst/>
+          </a:prstGeom>
+        </p:spPr>
+        <p:txBody>
+          <a:bodyPr vert="horz" lIns="91440" tIns="45720" rIns="91440" bIns="45720" rtlCol="0"/>
+          <a:lstStyle/>
+          <a:p>
+            <a:pPr lvl="0"/>
+            <a:r>
+              <a:rPr lang="en-US" smtClean="0"/>
+              <a:t>Click to edit Master text styles</a:t>
+            </a:r>
+          </a:p>
+          <a:p>
+            <a:pPr lvl="1"/>
+            <a:r>
+              <a:rPr lang="en-US" smtClean="0"/>
+              <a:t>Second level</a:t>
+            </a:r>
+          </a:p>
+          <a:p>
+            <a:pPr lvl="2"/>
+            <a:r>
+              <a:rPr lang="en-US" smtClean="0"/>
+              <a:t>Third level</a:t>
+            </a:r>
+          </a:p>
+          <a:p>
+            <a:pPr lvl="3"/>
+            <a:r>
+              <a:rPr lang="en-US" smtClean="0"/>
+              <a:t>Fourth level</a:t>
+            </a:r>
+          </a:p>
+          <a:p>
+            <a:pPr lvl="4"/>
+            <a:r>
+              <a:rPr lang="en-US" smtClean="0"/>
+              <a:t>Fifth level</a:t>
+            </a:r>
+            <a:endParaRPr lang="en-US"/>
+          </a:p>
+        </p:txBody>
+      </p:sp>
+      <p:sp>
+        <p:nvSpPr>
+          <p:cNvPr id="6" name="Footer Placeholder 5"/>
+          <p:cNvSpPr>
+            <a:spLocks noGrp="1"/>
+          </p:cNvSpPr>
+          <p:nvPr>
+            <p:ph type="ftr" sz="quarter" idx="4"/>
+          </p:nvPr>
+        </p:nvSpPr>
+        <p:spPr>
+          <a:xfrm>
+            <a:off x="0" y="8685213"/>
+            <a:ext cx="2971800" cy="457200"/>
+          </a:xfrm>
+          <a:prstGeom prst="rect">
+            <a:avLst/>
+          </a:prstGeom>
+        </p:spPr>
+        <p:txBody>
+          <a:bodyPr vert="horz" lIns="91440" tIns="45720" rIns="91440" bIns="45720" rtlCol="0" anchor="b"/>
+          <a:lstStyle>
+            <a:lvl1pPr algn="l">
+              <a:defRPr sz="1200"/>
+            </a:lvl1pPr>
+          </a:lstStyle>
+          <a:p>
+            <a:endParaRPr lang="en-US"/>
+          </a:p>
+        </p:txBody>
+      </p:sp>
+      <p:sp>
+        <p:nvSpPr>
+          <p:cNvPr id="7" name="Slide Number Placeholder 6"/>
+          <p:cNvSpPr>
+            <a:spLocks noGrp="1"/>
+          </p:cNvSpPr>
+          <p:nvPr>
+            <p:ph type="sldNum" sz="quarter" idx="5"/>
+          </p:nvPr>
+        </p:nvSpPr>
+        <p:spPr>
+          <a:xfrm>
+            <a:off x="3884613" y="8685213"/>
+            <a:ext cx="2971800" cy="457200"/>
+          </a:xfrm>
+          <a:prstGeom prst="rect">
+            <a:avLst/>
+          </a:prstGeom>
+        </p:spPr>
+        <p:txBody>
+          <a:bodyPr vert="horz" lIns="91440" tIns="45720" rIns="91440" bIns="45720" rtlCol="0" anchor="b"/>
+          <a:lstStyle>
+            <a:lvl1pPr algn="r">
+              <a:defRPr sz="1200"/>
+            </a:lvl1pPr>
+          </a:lstStyle>
+          <a:p>
+            <a:fld id="{BB5E49A5-4136-284D-997B-48E1D791AD67}" type="slidenum">
+              <a:rPr lang="en-US" smtClean="0"/>
+              <a:t>‹#›</a:t>
+            </a:fld>
+            <a:endParaRPr lang="en-US"/>
+          </a:p>
+        </p:txBody>
+      </p:sp>
+    </p:spTree>
+    <p:extLst>
+      <p:ext uri="{BB962C8B-B14F-4D97-AF65-F5344CB8AC3E}">
+        <p14:creationId xmlns:p14="http://schemas.microsoft.com/office/powerpoint/2010/main" val="2623252185"/>
+      </p:ext>
+    </p:extLst>
+  </p:cSld>
+  <p:clrMap bg1="lt1" tx1="dk1" bg2="lt2" tx2="dk2" accent1="accent1" accent2="accent2" accent3="accent3" accent4="accent4" accent5="accent5" accent6="accent6" hlink="hlink" folHlink="folHlink"/>
+  <p:notesStyle>
+    <a:lvl1pPr marL="0" algn="l" defTabSz="457200" rtl="0" eaLnBrk="1" latinLnBrk="0" hangingPunct="1">
+      <a:defRPr sz="1200" kern="1200">
+        <a:solidFill>
+          <a:schemeClr val="tx1"/>
+        </a:solidFill>
+        <a:latin typeface="+mn-lt"/>
+        <a:ea typeface="+mn-ea"/>
+        <a:cs typeface="+mn-cs"/>
+      </a:defRPr>
+    </a:lvl1pPr>
+    <a:lvl2pPr marL="457200" algn="l" defTabSz="457200" rtl="0" eaLnBrk="1" latinLnBrk="0" hangingPunct="1">
+      <a:defRPr sz="1200" kern="1200">
+        <a:solidFill>
+          <a:schemeClr val="tx1"/>
+        </a:solidFill>
+        <a:latin typeface="+mn-lt"/>
+        <a:ea typeface="+mn-ea"/>
+        <a:cs typeface="+mn-cs"/>
+      </a:defRPr>
+    </a:lvl2pPr>
+    <a:lvl3pPr marL="914400" algn="l" defTabSz="457200" rtl="0" eaLnBrk="1" latinLnBrk="0" hangingPunct="1">
+      <a:defRPr sz="1200" kern="1200">
+        <a:solidFill>
+          <a:schemeClr val="tx1"/>
+        </a:solidFill>
+        <a:latin typeface="+mn-lt"/>
+        <a:ea typeface="+mn-ea"/>
+        <a:cs typeface="+mn-cs"/>
+      </a:defRPr>
+    </a:lvl3pPr>
+    <a:lvl4pPr marL="1371600" algn="l" defTabSz="457200" rtl="0" eaLnBrk="1" latinLnBrk="0" hangingPunct="1">
+      <a:defRPr sz="1200" kern="1200">
+        <a:solidFill>
+          <a:schemeClr val="tx1"/>
+        </a:solidFill>
+        <a:latin typeface="+mn-lt"/>
+        <a:ea typeface="+mn-ea"/>
+        <a:cs typeface="+mn-cs"/>
+      </a:defRPr>
+    </a:lvl4pPr>
+    <a:lvl5pPr marL="1828800" algn="l" defTabSz="457200" rtl="0" eaLnBrk="1" latinLnBrk="0" hangingPunct="1">
+      <a:defRPr sz="1200" kern="1200">
+        <a:solidFill>
+          <a:schemeClr val="tx1"/>
+        </a:solidFill>
+        <a:latin typeface="+mn-lt"/>
+        <a:ea typeface="+mn-ea"/>
+        <a:cs typeface="+mn-cs"/>
+      </a:defRPr>
+    </a:lvl5pPr>
+    <a:lvl6pPr marL="2286000" algn="l" defTabSz="457200" rtl="0" eaLnBrk="1" latinLnBrk="0" hangingPunct="1">
+      <a:defRPr sz="1200" kern="1200">
+        <a:solidFill>
+          <a:schemeClr val="tx1"/>
+        </a:solidFill>
+        <a:latin typeface="+mn-lt"/>
+        <a:ea typeface="+mn-ea"/>
+        <a:cs typeface="+mn-cs"/>
+      </a:defRPr>
+    </a:lvl6pPr>
+    <a:lvl7pPr marL="2743200" algn="l" defTabSz="457200" rtl="0" eaLnBrk="1" latinLnBrk="0" hangingPunct="1">
+      <a:defRPr sz="1200" kern="1200">
+        <a:solidFill>
+          <a:schemeClr val="tx1"/>
+        </a:solidFill>
+        <a:latin typeface="+mn-lt"/>
+        <a:ea typeface="+mn-ea"/>
+        <a:cs typeface="+mn-cs"/>
+      </a:defRPr>
+    </a:lvl7pPr>
+    <a:lvl8pPr marL="3200400" algn="l" defTabSz="457200" rtl="0" eaLnBrk="1" latinLnBrk="0" hangingPunct="1">
+      <a:defRPr sz="1200" kern="1200">
+        <a:solidFill>
+          <a:schemeClr val="tx1"/>
+        </a:solidFill>
+        <a:latin typeface="+mn-lt"/>
+        <a:ea typeface="+mn-ea"/>
+        <a:cs typeface="+mn-cs"/>
+      </a:defRPr>
+    </a:lvl8pPr>
+    <a:lvl9pPr marL="3657600" algn="l" defTabSz="457200" rtl="0" eaLnBrk="1" latinLnBrk="0" hangingPunct="1">
+      <a:defRPr sz="1200" kern="1200">
+        <a:solidFill>
+          <a:schemeClr val="tx1"/>
+        </a:solidFill>
+        <a:latin typeface="+mn-lt"/>
+        <a:ea typeface="+mn-ea"/>
+        <a:cs typeface="+mn-cs"/>
+      </a:defRPr>
+    </a:lvl9pPr>
+  </p:notesStyle>
+</p:notesMaster>
+</file>
+
+<file path=ppt/notesSlides/notesSlide1.xml><?xml version="1.0" encoding="utf-8"?>
+<p:notes xmlns:a="http://schemas.openxmlformats.org/drawingml/2006/main" xmlns:p="http://schemas.openxmlformats.org/presentationml/2006/main" xmlns:r="http://schemas.openxmlformats.org/officeDocument/2006/relationships">
+  <p:cSld>
+    <p:spTree>
+      <p:nvGrpSpPr>
+        <p:cNvPr id="1" name=""/>
+        <p:cNvGrpSpPr/>
+        <p:nvPr/>
+      </p:nvGrpSpPr>
+      <p:grpSpPr>
+        <a:xfrm>
+          <a:off x="0" y="0"/>
+          <a:ext cx="0" cy="0"/>
+          <a:chOff x="0" y="0"/>
+          <a:chExt cx="0" cy="0"/>
+        </a:xfrm>
+      </p:grpSpPr>
+      <p:sp>
+        <p:nvSpPr>
+          <p:cNvPr id="2" name="Slide Image Placeholder 1"/>
+          <p:cNvSpPr>
+            <a:spLocks noGrp="1"/>
+          </p:cNvSpPr>
+          <p:nvPr>
+            <p:ph type="sldImg" idx="2"/>
+          </p:nvPr>
+        </p:nvSpPr>
+        <p:spPr/>
+      </p:sp>
+      <p:sp>
+        <p:nvSpPr>
+          <p:cNvPr id="3" name="Notes Placeholder 2"/>
+          <p:cNvSpPr>
+            <a:spLocks noGrp="1"/>
+          </p:cNvSpPr>
+          <p:nvPr>
+            <p:ph type="body" idx="3" sz="quarter"/>
+          </p:nvPr>
+        </p:nvSpPr>
+        <p:spPr/>
+        <p:txBody>
+          <a:bodyPr/>
+          <a:lstStyle/>
+          <a:p>
+            <a:r>
+              <a:t>Aula 4. Assim como STRIDE modela ameaças de segurança, LINDDUN modela ameaças de PRIVACIDADE. Combinado com Privacy by Design e o RIPD (LGPD art. 38), fecha a parte de privacidade da Fase 2. Entregável: LINDDUN-per-element + esboço de RIPD.</a:t>
+            </a:r>
+          </a:p>
+        </p:txBody>
+      </p:sp>
+      <p:sp>
+        <p:nvSpPr>
+          <p:cNvPr id="4" name="Slide Number Placeholder 3"/>
+          <p:cNvSpPr>
+            <a:spLocks noGrp="1"/>
+          </p:cNvSpPr>
+          <p:nvPr>
+            <p:ph type="sldNum" idx="5" sz="quarter"/>
+          </p:nvPr>
+        </p:nvSpPr>
+        <p:spPr/>
+      </p:sp>
+    </p:spTree>
+  </p:cSld>
+  <p:clrMapOvr>
+    <a:masterClrMapping/>
+  </p:clrMapOvr>
+</p:notes>
+</file>
+
+<file path=ppt/notesSlides/notesSlide2.xml><?xml version="1.0" encoding="utf-8"?>
+<p:notes xmlns:a="http://schemas.openxmlformats.org/drawingml/2006/main" xmlns:p="http://schemas.openxmlformats.org/presentationml/2006/main" xmlns:r="http://schemas.openxmlformats.org/officeDocument/2006/relationships">
+  <p:cSld>
+    <p:spTree>
+      <p:nvGrpSpPr>
+        <p:cNvPr id="1" name=""/>
+        <p:cNvGrpSpPr/>
+        <p:nvPr/>
+      </p:nvGrpSpPr>
+      <p:grpSpPr>
+        <a:xfrm>
+          <a:off x="0" y="0"/>
+          <a:ext cx="0" cy="0"/>
+          <a:chOff x="0" y="0"/>
+          <a:chExt cx="0" cy="0"/>
+        </a:xfrm>
+      </p:grpSpPr>
+      <p:sp>
+        <p:nvSpPr>
+          <p:cNvPr id="2" name="Slide Image Placeholder 1"/>
+          <p:cNvSpPr>
+            <a:spLocks noGrp="1"/>
+          </p:cNvSpPr>
+          <p:nvPr>
+            <p:ph type="sldImg" idx="2"/>
+          </p:nvPr>
+        </p:nvSpPr>
+        <p:spPr/>
+      </p:sp>
+      <p:sp>
+        <p:nvSpPr>
+          <p:cNvPr id="3" name="Notes Placeholder 2"/>
+          <p:cNvSpPr>
+            <a:spLocks noGrp="1"/>
+          </p:cNvSpPr>
+          <p:nvPr>
+            <p:ph type="body" idx="3" sz="quarter"/>
+          </p:nvPr>
+        </p:nvSpPr>
+        <p:spPr/>
+        <p:txBody>
+          <a:bodyPr/>
+          <a:lstStyle/>
+          <a:p>
+            <a:r>
+              <a:t>Privacy by Design (Ann Cavoukian, 1995) é o método por trás da LGPD/GDPR. A ideia-chave: privacidade não se 'cola' no fim — nasce no design, é o padrão e não pede esforço do usuário. Contraste com o VidaPlus legado, que coleta dados sem consentimento e por padrão expõe tudo.</a:t>
+            </a:r>
+          </a:p>
+        </p:txBody>
+      </p:sp>
+      <p:sp>
+        <p:nvSpPr>
+          <p:cNvPr id="4" name="Slide Number Placeholder 3"/>
+          <p:cNvSpPr>
+            <a:spLocks noGrp="1"/>
+          </p:cNvSpPr>
+          <p:nvPr>
+            <p:ph type="sldNum" idx="5" sz="quarter"/>
+          </p:nvPr>
+        </p:nvSpPr>
+        <p:spPr/>
+      </p:sp>
+    </p:spTree>
+  </p:cSld>
+  <p:clrMapOvr>
+    <a:masterClrMapping/>
+  </p:clrMapOvr>
+</p:notes>
+</file>
+
+<file path=ppt/notesSlides/notesSlide3.xml><?xml version="1.0" encoding="utf-8"?>
+<p:notes xmlns:a="http://schemas.openxmlformats.org/drawingml/2006/main" xmlns:p="http://schemas.openxmlformats.org/presentationml/2006/main" xmlns:r="http://schemas.openxmlformats.org/officeDocument/2006/relationships">
+  <p:cSld>
+    <p:spTree>
+      <p:nvGrpSpPr>
+        <p:cNvPr id="1" name=""/>
+        <p:cNvGrpSpPr/>
+        <p:nvPr/>
+      </p:nvGrpSpPr>
+      <p:grpSpPr>
+        <a:xfrm>
+          <a:off x="0" y="0"/>
+          <a:ext cx="0" cy="0"/>
+          <a:chOff x="0" y="0"/>
+          <a:chExt cx="0" cy="0"/>
+        </a:xfrm>
+      </p:grpSpPr>
+      <p:sp>
+        <p:nvSpPr>
+          <p:cNvPr id="2" name="Slide Image Placeholder 1"/>
+          <p:cNvSpPr>
+            <a:spLocks noGrp="1"/>
+          </p:cNvSpPr>
+          <p:nvPr>
+            <p:ph type="sldImg" idx="2"/>
+          </p:nvPr>
+        </p:nvSpPr>
+        <p:spPr/>
+      </p:sp>
+      <p:sp>
+        <p:nvSpPr>
+          <p:cNvPr id="3" name="Notes Placeholder 2"/>
+          <p:cNvSpPr>
+            <a:spLocks noGrp="1"/>
+          </p:cNvSpPr>
+          <p:nvPr>
+            <p:ph type="body" idx="3" sz="quarter"/>
+          </p:nvPr>
+        </p:nvSpPr>
+        <p:spPr/>
+        <p:txBody>
+          <a:bodyPr/>
+          <a:lstStyle/>
+          <a:p>
+            <a:r>
+              <a:t>LINDDUN roda sobre o MESMO DFD do STRIDE: para cada elemento, pergunte quais das 7 ameaças de privacidade se aplicam. Repare que um mesmo problema aparece em várias lentes: o IDOR do laudo é Elevation of Privilege (STRIDE), Disclosure + Linkability (LINDDUN) e violação do art. 11/46 (LGPD).</a:t>
+            </a:r>
+          </a:p>
+        </p:txBody>
+      </p:sp>
+      <p:sp>
+        <p:nvSpPr>
+          <p:cNvPr id="4" name="Slide Number Placeholder 3"/>
+          <p:cNvSpPr>
+            <a:spLocks noGrp="1"/>
+          </p:cNvSpPr>
+          <p:nvPr>
+            <p:ph type="sldNum" idx="5" sz="quarter"/>
+          </p:nvPr>
+        </p:nvSpPr>
+        <p:spPr/>
+      </p:sp>
+    </p:spTree>
+  </p:cSld>
+  <p:clrMapOvr>
+    <a:masterClrMapping/>
+  </p:clrMapOvr>
+</p:notes>
+</file>
+
+<file path=ppt/notesSlides/notesSlide4.xml><?xml version="1.0" encoding="utf-8"?>
+<p:notes xmlns:a="http://schemas.openxmlformats.org/drawingml/2006/main" xmlns:p="http://schemas.openxmlformats.org/presentationml/2006/main" xmlns:r="http://schemas.openxmlformats.org/officeDocument/2006/relationships">
+  <p:cSld>
+    <p:spTree>
+      <p:nvGrpSpPr>
+        <p:cNvPr id="1" name=""/>
+        <p:cNvGrpSpPr/>
+        <p:nvPr/>
+      </p:nvGrpSpPr>
+      <p:grpSpPr>
+        <a:xfrm>
+          <a:off x="0" y="0"/>
+          <a:ext cx="0" cy="0"/>
+          <a:chOff x="0" y="0"/>
+          <a:chExt cx="0" cy="0"/>
+        </a:xfrm>
+      </p:grpSpPr>
+      <p:sp>
+        <p:nvSpPr>
+          <p:cNvPr id="2" name="Slide Image Placeholder 1"/>
+          <p:cNvSpPr>
+            <a:spLocks noGrp="1"/>
+          </p:cNvSpPr>
+          <p:nvPr>
+            <p:ph type="sldImg" idx="2"/>
+          </p:nvPr>
+        </p:nvSpPr>
+        <p:spPr/>
+      </p:sp>
+      <p:sp>
+        <p:nvSpPr>
+          <p:cNvPr id="3" name="Notes Placeholder 2"/>
+          <p:cNvSpPr>
+            <a:spLocks noGrp="1"/>
+          </p:cNvSpPr>
+          <p:nvPr>
+            <p:ph type="body" idx="3" sz="quarter"/>
+          </p:nvPr>
+        </p:nvSpPr>
+        <p:spPr/>
+        <p:txBody>
+          <a:bodyPr/>
+          <a:lstStyle/>
+          <a:p>
+            <a:r>
+              <a:t>Exemplo aplicado ao VidaPlus. Cada ameaça vira um controle — chamado PET (Privacy Enhancing Technology): pseudonimização (id opaco no lugar do CPF), minimização (remover campo sem finalidade), anonimização (tornar o titular não identificável) e controle de acesso. Ameaça de privacidade priorizada = requisito com teste na matriz.</a:t>
+            </a:r>
+          </a:p>
+        </p:txBody>
+      </p:sp>
+      <p:sp>
+        <p:nvSpPr>
+          <p:cNvPr id="4" name="Slide Number Placeholder 3"/>
+          <p:cNvSpPr>
+            <a:spLocks noGrp="1"/>
+          </p:cNvSpPr>
+          <p:nvPr>
+            <p:ph type="sldNum" idx="5" sz="quarter"/>
+          </p:nvPr>
+        </p:nvSpPr>
+        <p:spPr/>
+      </p:sp>
+    </p:spTree>
+  </p:cSld>
+  <p:clrMapOvr>
+    <a:masterClrMapping/>
+  </p:clrMapOvr>
+</p:notes>
+</file>
+
+<file path=ppt/notesSlides/notesSlide5.xml><?xml version="1.0" encoding="utf-8"?>
+<p:notes xmlns:a="http://schemas.openxmlformats.org/drawingml/2006/main" xmlns:p="http://schemas.openxmlformats.org/presentationml/2006/main" xmlns:r="http://schemas.openxmlformats.org/officeDocument/2006/relationships">
+  <p:cSld>
+    <p:spTree>
+      <p:nvGrpSpPr>
+        <p:cNvPr id="1" name=""/>
+        <p:cNvGrpSpPr/>
+        <p:nvPr/>
+      </p:nvGrpSpPr>
+      <p:grpSpPr>
+        <a:xfrm>
+          <a:off x="0" y="0"/>
+          <a:ext cx="0" cy="0"/>
+          <a:chOff x="0" y="0"/>
+          <a:chExt cx="0" cy="0"/>
+        </a:xfrm>
+      </p:grpSpPr>
+      <p:sp>
+        <p:nvSpPr>
+          <p:cNvPr id="2" name="Slide Image Placeholder 1"/>
+          <p:cNvSpPr>
+            <a:spLocks noGrp="1"/>
+          </p:cNvSpPr>
+          <p:nvPr>
+            <p:ph type="sldImg" idx="2"/>
+          </p:nvPr>
+        </p:nvSpPr>
+        <p:spPr/>
+      </p:sp>
+      <p:sp>
+        <p:nvSpPr>
+          <p:cNvPr id="3" name="Notes Placeholder 2"/>
+          <p:cNvSpPr>
+            <a:spLocks noGrp="1"/>
+          </p:cNvSpPr>
+          <p:nvPr>
+            <p:ph type="body" idx="3" sz="quarter"/>
+          </p:nvPr>
+        </p:nvSpPr>
+        <p:spPr/>
+        <p:txBody>
+          <a:bodyPr/>
+          <a:lstStyle/>
+          <a:p>
+            <a:r>
+              <a:t>As PETs são o repertório de controle de privacidade. Minimização e retenção atacam a causa (não coletar/não guardar demais); pseudonimização e anonimização reduzem o dano se houver vazamento. A eliminação do titular no VidaPlus usa ANONIMIZAÇÃO do prontuário (dever de guarda) e remoção da credencial.</a:t>
+            </a:r>
+          </a:p>
+        </p:txBody>
+      </p:sp>
+      <p:sp>
+        <p:nvSpPr>
+          <p:cNvPr id="4" name="Slide Number Placeholder 3"/>
+          <p:cNvSpPr>
+            <a:spLocks noGrp="1"/>
+          </p:cNvSpPr>
+          <p:nvPr>
+            <p:ph type="sldNum" idx="5" sz="quarter"/>
+          </p:nvPr>
+        </p:nvSpPr>
+        <p:spPr/>
+      </p:sp>
+    </p:spTree>
+  </p:cSld>
+  <p:clrMapOvr>
+    <a:masterClrMapping/>
+  </p:clrMapOvr>
+</p:notes>
+</file>
+
+<file path=ppt/notesSlides/notesSlide6.xml><?xml version="1.0" encoding="utf-8"?>
+<p:notes xmlns:a="http://schemas.openxmlformats.org/drawingml/2006/main" xmlns:p="http://schemas.openxmlformats.org/presentationml/2006/main" xmlns:r="http://schemas.openxmlformats.org/officeDocument/2006/relationships">
+  <p:cSld>
+    <p:spTree>
+      <p:nvGrpSpPr>
+        <p:cNvPr id="1" name=""/>
+        <p:cNvGrpSpPr/>
+        <p:nvPr/>
+      </p:nvGrpSpPr>
+      <p:grpSpPr>
+        <a:xfrm>
+          <a:off x="0" y="0"/>
+          <a:ext cx="0" cy="0"/>
+          <a:chOff x="0" y="0"/>
+          <a:chExt cx="0" cy="0"/>
+        </a:xfrm>
+      </p:grpSpPr>
+      <p:sp>
+        <p:nvSpPr>
+          <p:cNvPr id="2" name="Slide Image Placeholder 1"/>
+          <p:cNvSpPr>
+            <a:spLocks noGrp="1"/>
+          </p:cNvSpPr>
+          <p:nvPr>
+            <p:ph type="sldImg" idx="2"/>
+          </p:nvPr>
+        </p:nvSpPr>
+        <p:spPr/>
+      </p:sp>
+      <p:sp>
+        <p:nvSpPr>
+          <p:cNvPr id="3" name="Notes Placeholder 2"/>
+          <p:cNvSpPr>
+            <a:spLocks noGrp="1"/>
+          </p:cNvSpPr>
+          <p:nvPr>
+            <p:ph type="body" idx="3" sz="quarter"/>
+          </p:nvPr>
+        </p:nvSpPr>
+        <p:spPr/>
+        <p:txBody>
+          <a:bodyPr/>
+          <a:lstStyle/>
+          <a:p>
+            <a:r>
+              <a:t>O RIPD (ou DPIA) é o documento formal que a LGPD exige quando o tratamento é de alto risco — caso do VidaPlus (saúde em larga escala). A boa notícia: você não parte do zero; a tabela LINDDUN priorizada JÁ é o miolo do RIPD (ameaça, risco, medida, risco residual). Entregável desta fase.</a:t>
+            </a:r>
+          </a:p>
+        </p:txBody>
+      </p:sp>
+      <p:sp>
+        <p:nvSpPr>
+          <p:cNvPr id="4" name="Slide Number Placeholder 3"/>
+          <p:cNvSpPr>
+            <a:spLocks noGrp="1"/>
+          </p:cNvSpPr>
+          <p:nvPr>
+            <p:ph type="sldNum" idx="5" sz="quarter"/>
+          </p:nvPr>
+        </p:nvSpPr>
+        <p:spPr/>
+      </p:sp>
+    </p:spTree>
+  </p:cSld>
+  <p:clrMapOvr>
+    <a:masterClrMapping/>
+  </p:clrMapOvr>
+</p:notes>
+</file>
+
+<file path=ppt/notesSlides/notesSlide7.xml><?xml version="1.0" encoding="utf-8"?>
+<p:notes xmlns:a="http://schemas.openxmlformats.org/drawingml/2006/main" xmlns:p="http://schemas.openxmlformats.org/presentationml/2006/main" xmlns:r="http://schemas.openxmlformats.org/officeDocument/2006/relationships">
+  <p:cSld>
+    <p:spTree>
+      <p:nvGrpSpPr>
+        <p:cNvPr id="1" name=""/>
+        <p:cNvGrpSpPr/>
+        <p:nvPr/>
+      </p:nvGrpSpPr>
+      <p:grpSpPr>
+        <a:xfrm>
+          <a:off x="0" y="0"/>
+          <a:ext cx="0" cy="0"/>
+          <a:chOff x="0" y="0"/>
+          <a:chExt cx="0" cy="0"/>
+        </a:xfrm>
+      </p:grpSpPr>
+      <p:sp>
+        <p:nvSpPr>
+          <p:cNvPr id="2" name="Slide Image Placeholder 1"/>
+          <p:cNvSpPr>
+            <a:spLocks noGrp="1"/>
+          </p:cNvSpPr>
+          <p:nvPr>
+            <p:ph type="sldImg" idx="2"/>
+          </p:nvPr>
+        </p:nvSpPr>
+        <p:spPr/>
+      </p:sp>
+      <p:sp>
+        <p:nvSpPr>
+          <p:cNvPr id="3" name="Notes Placeholder 2"/>
+          <p:cNvSpPr>
+            <a:spLocks noGrp="1"/>
+          </p:cNvSpPr>
+          <p:nvPr>
+            <p:ph type="body" idx="3" sz="quarter"/>
+          </p:nvPr>
+        </p:nvSpPr>
+        <p:spPr/>
+        <p:txBody>
+          <a:bodyPr/>
+          <a:lstStyle/>
+          <a:p>
+            <a:r>
+              <a:t>Feche a Fase 2: além do STRIDE (segurança), entregue o LINDDUN (privacidade) e o esboço do RIPD. Os requisitos de privacidade daqui entram no catálogo consolidado da Aula 5. Esta é a fase de maior peso na avaliação da disciplina.</a:t>
+            </a:r>
+          </a:p>
+        </p:txBody>
+      </p:sp>
+      <p:sp>
+        <p:nvSpPr>
+          <p:cNvPr id="4" name="Slide Number Placeholder 3"/>
+          <p:cNvSpPr>
+            <a:spLocks noGrp="1"/>
+          </p:cNvSpPr>
+          <p:nvPr>
+            <p:ph type="sldNum" idx="5" sz="quarter"/>
+          </p:nvPr>
+        </p:nvSpPr>
+        <p:spPr/>
+      </p:sp>
+    </p:spTree>
+  </p:cSld>
+  <p:clrMapOvr>
+    <a:masterClrMapping/>
+  </p:clrMapOvr>
+</p:notes>
 </file>
 
 <file path=ppt/slideLayouts/slideLayout1.xml><?xml version="1.0" encoding="utf-8"?>
@@ -3461,6 +4302,457 @@
         <p:spPr>
           <a:xfrm>
             <a:off x="0" y="0"/>
+            <a:ext cx="12191695" cy="1234440"/>
+          </a:xfrm>
+          <a:prstGeom prst="rect">
+            <a:avLst/>
+          </a:prstGeom>
+          <a:solidFill>
+            <a:srgbClr val="2D7A3D"/>
+          </a:solidFill>
+          <a:ln>
+            <a:noFill/>
+          </a:ln>
+          <a:effectLst/>
+        </p:spPr>
+        <p:style>
+          <a:lnRef idx="1">
+            <a:schemeClr val="accent1"/>
+          </a:lnRef>
+          <a:fillRef idx="3">
+            <a:schemeClr val="accent1"/>
+          </a:fillRef>
+          <a:effectRef idx="2">
+            <a:schemeClr val="accent1"/>
+          </a:effectRef>
+          <a:fontRef idx="minor">
+            <a:schemeClr val="lt1"/>
+          </a:fontRef>
+        </p:style>
+        <p:txBody>
+          <a:bodyPr rtlCol="0" anchor="ctr"/>
+          <a:lstStyle/>
+          <a:p>
+            <a:pPr algn="ctr"/>
+          </a:p>
+        </p:txBody>
+      </p:sp>
+      <p:sp>
+        <p:nvSpPr>
+          <p:cNvPr id="3" name="TextBox 2"/>
+          <p:cNvSpPr txBox="1"/>
+          <p:nvPr/>
+        </p:nvSpPr>
+        <p:spPr>
+          <a:xfrm>
+            <a:off x="457200" y="164592"/>
+            <a:ext cx="11247120" cy="640080"/>
+          </a:xfrm>
+          <a:prstGeom prst="rect">
+            <a:avLst/>
+          </a:prstGeom>
+          <a:noFill/>
+        </p:spPr>
+        <p:txBody>
+          <a:bodyPr wrap="square" anchor="t" lIns="0" rIns="0" tIns="0" bIns="0">
+            <a:spAutoFit/>
+          </a:bodyPr>
+          <a:lstStyle/>
+          <a:p>
+            <a:pPr algn="l">
+              <a:lnSpc>
+                <a:spcPct val="100000"/>
+              </a:lnSpc>
+              <a:spcBef>
+                <a:spcPts val="0"/>
+              </a:spcBef>
+              <a:spcAft>
+                <a:spcPts val="600"/>
+              </a:spcAft>
+            </a:pPr>
+            <a:r>
+              <a:rPr sz="3200" b="1" i="0">
+                <a:solidFill>
+                  <a:srgbClr val="FFFFFF"/>
+                </a:solidFill>
+                <a:latin typeface="Open Sans"/>
+              </a:rPr>
+              <a:t>Entregável da Fase 2b</a:t>
+            </a:r>
+          </a:p>
+        </p:txBody>
+      </p:sp>
+      <p:sp>
+        <p:nvSpPr>
+          <p:cNvPr id="4" name="TextBox 3"/>
+          <p:cNvSpPr txBox="1"/>
+          <p:nvPr/>
+        </p:nvSpPr>
+        <p:spPr>
+          <a:xfrm>
+            <a:off x="457200" y="777240"/>
+            <a:ext cx="11247120" cy="365760"/>
+          </a:xfrm>
+          <a:prstGeom prst="rect">
+            <a:avLst/>
+          </a:prstGeom>
+          <a:noFill/>
+        </p:spPr>
+        <p:txBody>
+          <a:bodyPr wrap="square" anchor="t" lIns="0" rIns="0" tIns="0" bIns="0">
+            <a:spAutoFit/>
+          </a:bodyPr>
+          <a:lstStyle/>
+          <a:p>
+            <a:pPr algn="l">
+              <a:lnSpc>
+                <a:spcPct val="100000"/>
+              </a:lnSpc>
+              <a:spcBef>
+                <a:spcPts val="0"/>
+              </a:spcBef>
+              <a:spcAft>
+                <a:spcPts val="600"/>
+              </a:spcAft>
+            </a:pPr>
+            <a:r>
+              <a:rPr sz="1600" b="0" i="1">
+                <a:solidFill>
+                  <a:srgbClr val="E0E8DB"/>
+                </a:solidFill>
+                <a:latin typeface="Open Sans"/>
+              </a:rPr>
+              <a:t>Modelo de ameaças de privacidade</a:t>
+            </a:r>
+          </a:p>
+        </p:txBody>
+      </p:sp>
+      <p:sp>
+        <p:nvSpPr>
+          <p:cNvPr id="5" name="Rounded Rectangle 4"/>
+          <p:cNvSpPr/>
+          <p:nvPr/>
+        </p:nvSpPr>
+        <p:spPr>
+          <a:xfrm>
+            <a:off x="411480" y="1463040"/>
+            <a:ext cx="11384280" cy="5029200"/>
+          </a:xfrm>
+          <a:prstGeom prst="roundRect">
+            <a:avLst/>
+          </a:prstGeom>
+          <a:solidFill>
+            <a:srgbClr val="F5F5F5"/>
+          </a:solidFill>
+          <a:ln w="15875">
+            <a:solidFill>
+              <a:srgbClr val="7CB342"/>
+            </a:solidFill>
+          </a:ln>
+          <a:effectLst/>
+        </p:spPr>
+        <p:style>
+          <a:lnRef idx="1">
+            <a:schemeClr val="accent1"/>
+          </a:lnRef>
+          <a:fillRef idx="3">
+            <a:schemeClr val="accent1"/>
+          </a:fillRef>
+          <a:effectRef idx="2">
+            <a:schemeClr val="accent1"/>
+          </a:effectRef>
+          <a:fontRef idx="minor">
+            <a:schemeClr val="lt1"/>
+          </a:fontRef>
+        </p:style>
+        <p:txBody>
+          <a:bodyPr rtlCol="0" anchor="ctr"/>
+          <a:lstStyle/>
+          <a:p>
+            <a:pPr algn="ctr"/>
+          </a:p>
+        </p:txBody>
+      </p:sp>
+      <p:sp>
+        <p:nvSpPr>
+          <p:cNvPr id="6" name="TextBox 5"/>
+          <p:cNvSpPr txBox="1"/>
+          <p:nvPr/>
+        </p:nvSpPr>
+        <p:spPr>
+          <a:xfrm>
+            <a:off x="868680" y="1783080"/>
+            <a:ext cx="10515600" cy="4572000"/>
+          </a:xfrm>
+          <a:prstGeom prst="rect">
+            <a:avLst/>
+          </a:prstGeom>
+          <a:noFill/>
+        </p:spPr>
+        <p:txBody>
+          <a:bodyPr wrap="square">
+            <a:spAutoFit/>
+          </a:bodyPr>
+          <a:lstStyle/>
+          <a:p>
+            <a:pPr algn="l">
+              <a:lnSpc>
+                <a:spcPct val="110000"/>
+              </a:lnSpc>
+              <a:spcAft>
+                <a:spcPts val="1400"/>
+              </a:spcAft>
+            </a:pPr>
+            <a:r>
+              <a:rPr sz="2000" b="1">
+                <a:solidFill>
+                  <a:srgbClr val="7CB342"/>
+                </a:solidFill>
+                <a:latin typeface="Open Sans"/>
+              </a:rPr>
+              <a:t>▸ </a:t>
+            </a:r>
+            <a:r>
+              <a:rPr sz="1800" b="1">
+                <a:solidFill>
+                  <a:srgbClr val="2D7A3D"/>
+                </a:solidFill>
+                <a:latin typeface="Open Sans"/>
+              </a:rPr>
+              <a:t>LINDDUN-per-element: </a:t>
+            </a:r>
+            <a:r>
+              <a:rPr sz="1800">
+                <a:solidFill>
+                  <a:srgbClr val="212121"/>
+                </a:solidFill>
+                <a:latin typeface="Open Sans"/>
+              </a:rPr>
+              <a:t>rode sobre o mesmo DFD do STRIDE.</a:t>
+            </a:r>
+          </a:p>
+          <a:p>
+            <a:pPr algn="l">
+              <a:lnSpc>
+                <a:spcPct val="110000"/>
+              </a:lnSpc>
+              <a:spcAft>
+                <a:spcPts val="1400"/>
+              </a:spcAft>
+            </a:pPr>
+            <a:r>
+              <a:rPr sz="2000" b="1">
+                <a:solidFill>
+                  <a:srgbClr val="7CB342"/>
+                </a:solidFill>
+                <a:latin typeface="Open Sans"/>
+              </a:rPr>
+              <a:t>▸ </a:t>
+            </a:r>
+            <a:r>
+              <a:rPr sz="1800" b="1">
+                <a:solidFill>
+                  <a:srgbClr val="2D7A3D"/>
+                </a:solidFill>
+                <a:latin typeface="Open Sans"/>
+              </a:rPr>
+              <a:t>Controle/PET: </a:t>
+            </a:r>
+            <a:r>
+              <a:rPr sz="1800">
+                <a:solidFill>
+                  <a:srgbClr val="212121"/>
+                </a:solidFill>
+                <a:latin typeface="Open Sans"/>
+              </a:rPr>
+              <a:t>para cada ameaça, proponha minimização/pseudonimização/etc.</a:t>
+            </a:r>
+          </a:p>
+          <a:p>
+            <a:pPr algn="l">
+              <a:lnSpc>
+                <a:spcPct val="110000"/>
+              </a:lnSpc>
+              <a:spcAft>
+                <a:spcPts val="1400"/>
+              </a:spcAft>
+            </a:pPr>
+            <a:r>
+              <a:rPr sz="2000" b="1">
+                <a:solidFill>
+                  <a:srgbClr val="7CB342"/>
+                </a:solidFill>
+                <a:latin typeface="Open Sans"/>
+              </a:rPr>
+              <a:t>▸ </a:t>
+            </a:r>
+            <a:r>
+              <a:rPr sz="1800" b="1">
+                <a:solidFill>
+                  <a:srgbClr val="2D7A3D"/>
+                </a:solidFill>
+                <a:latin typeface="Open Sans"/>
+              </a:rPr>
+              <a:t>Minimização: </a:t>
+            </a:r>
+            <a:r>
+              <a:rPr sz="1800">
+                <a:solidFill>
+                  <a:srgbClr val="212121"/>
+                </a:solidFill>
+                <a:latin typeface="Open Sans"/>
+              </a:rPr>
+              <a:t>identifique campos sem finalidade (religião, renda no cadastro).</a:t>
+            </a:r>
+          </a:p>
+          <a:p>
+            <a:pPr algn="l">
+              <a:lnSpc>
+                <a:spcPct val="110000"/>
+              </a:lnSpc>
+              <a:spcAft>
+                <a:spcPts val="1400"/>
+              </a:spcAft>
+            </a:pPr>
+            <a:r>
+              <a:rPr sz="2000" b="1">
+                <a:solidFill>
+                  <a:srgbClr val="7CB342"/>
+                </a:solidFill>
+                <a:latin typeface="Open Sans"/>
+              </a:rPr>
+              <a:t>▸ </a:t>
+            </a:r>
+            <a:r>
+              <a:rPr sz="1800" b="1">
+                <a:solidFill>
+                  <a:srgbClr val="2D7A3D"/>
+                </a:solidFill>
+                <a:latin typeface="Open Sans"/>
+              </a:rPr>
+              <a:t>RIPD: </a:t>
+            </a:r>
+            <a:r>
+              <a:rPr sz="1800">
+                <a:solidFill>
+                  <a:srgbClr val="212121"/>
+                </a:solidFill>
+                <a:latin typeface="Open Sans"/>
+              </a:rPr>
+              <a:t>esboce o relatório a partir da tabela LINDDUN.</a:t>
+            </a:r>
+          </a:p>
+          <a:p>
+            <a:pPr algn="l">
+              <a:lnSpc>
+                <a:spcPct val="110000"/>
+              </a:lnSpc>
+              <a:spcAft>
+                <a:spcPts val="1400"/>
+              </a:spcAft>
+            </a:pPr>
+            <a:r>
+              <a:rPr sz="2000" b="1">
+                <a:solidFill>
+                  <a:srgbClr val="7CB342"/>
+                </a:solidFill>
+                <a:latin typeface="Open Sans"/>
+              </a:rPr>
+              <a:t>▸ </a:t>
+            </a:r>
+            <a:r>
+              <a:rPr sz="1800" b="1">
+                <a:solidFill>
+                  <a:srgbClr val="2D7A3D"/>
+                </a:solidFill>
+                <a:latin typeface="Open Sans"/>
+              </a:rPr>
+              <a:t>Regra: </a:t>
+            </a:r>
+            <a:r>
+              <a:rPr sz="1800">
+                <a:solidFill>
+                  <a:srgbClr val="212121"/>
+                </a:solidFill>
+                <a:latin typeface="Open Sans"/>
+              </a:rPr>
+              <a:t>ameaça de privacidade priorizada = requisito com teste.</a:t>
+            </a:r>
+          </a:p>
+        </p:txBody>
+      </p:sp>
+      <p:sp>
+        <p:nvSpPr>
+          <p:cNvPr id="7" name="TextBox 6"/>
+          <p:cNvSpPr txBox="1"/>
+          <p:nvPr/>
+        </p:nvSpPr>
+        <p:spPr>
+          <a:xfrm>
+            <a:off x="10972800" y="6446520"/>
+            <a:ext cx="914400" cy="320040"/>
+          </a:xfrm>
+          <a:prstGeom prst="rect">
+            <a:avLst/>
+          </a:prstGeom>
+          <a:noFill/>
+        </p:spPr>
+        <p:txBody>
+          <a:bodyPr wrap="square" anchor="t" lIns="0" rIns="0" tIns="0" bIns="0">
+            <a:spAutoFit/>
+          </a:bodyPr>
+          <a:lstStyle/>
+          <a:p>
+            <a:pPr algn="r">
+              <a:lnSpc>
+                <a:spcPct val="100000"/>
+              </a:lnSpc>
+              <a:spcBef>
+                <a:spcPts val="0"/>
+              </a:spcBef>
+              <a:spcAft>
+                <a:spcPts val="600"/>
+              </a:spcAft>
+            </a:pPr>
+            <a:r>
+              <a:rPr sz="1100" b="0" i="0">
+                <a:solidFill>
+                  <a:srgbClr val="616161"/>
+                </a:solidFill>
+                <a:latin typeface="Open Sans"/>
+              </a:rPr>
+              <a:t>10</a:t>
+            </a:r>
+          </a:p>
+        </p:txBody>
+      </p:sp>
+    </p:spTree>
+  </p:cSld>
+  <p:clrMapOvr>
+    <a:masterClrMapping/>
+  </p:clrMapOvr>
+</p:sld>
+</file>
+
+<file path=ppt/slides/slide11.xml><?xml version="1.0" encoding="utf-8"?>
+<p:sld xmlns:a="http://schemas.openxmlformats.org/drawingml/2006/main" xmlns:p="http://schemas.openxmlformats.org/presentationml/2006/main" xmlns:r="http://schemas.openxmlformats.org/officeDocument/2006/relationships">
+  <p:cSld>
+    <p:spTree>
+      <p:nvGrpSpPr>
+        <p:cNvPr id="1" name=""/>
+        <p:cNvGrpSpPr/>
+        <p:nvPr/>
+      </p:nvGrpSpPr>
+      <p:grpSpPr/>
+      <p:sp>
+        <p:nvSpPr>
+          <p:cNvPr id="2" name="Rectangle 1"/>
+          <p:cNvSpPr/>
+          <p:nvPr/>
+        </p:nvSpPr>
+        <p:spPr>
+          <a:xfrm>
+            <a:off x="0" y="0"/>
             <a:ext cx="12191695" cy="6858000"/>
           </a:xfrm>
           <a:prstGeom prst="rect">
@@ -4312,7 +5604,7 @@
                 </a:solidFill>
                 <a:latin typeface="Open Sans"/>
               </a:rPr>
-              <a:t>Proativo</a:t>
+              <a:t>Proativo, não reativo</a:t>
             </a:r>
           </a:p>
         </p:txBody>
@@ -4357,7 +5649,7 @@
                 </a:solidFill>
                 <a:latin typeface="Open Sans"/>
               </a:rPr>
-              <a:t>antecipar, não reagir</a:t>
+              <a:t>antecipar o problema, não remediar depois</a:t>
             </a:r>
           </a:p>
         </p:txBody>
@@ -4582,7 +5874,7 @@
                 </a:solidFill>
                 <a:latin typeface="Open Sans"/>
               </a:rPr>
-              <a:t>opt-in, coleta mínima</a:t>
+              <a:t>sem ação do usuário, o dado já está protegido</a:t>
             </a:r>
           </a:p>
         </p:txBody>
@@ -4807,7 +6099,7 @@
                 </a:solidFill>
                 <a:latin typeface="Open Sans"/>
               </a:rPr>
-              <a:t>não é 'add-on'</a:t>
+              <a:t>não é 'add-on' — é parte da arquitetura</a:t>
             </a:r>
           </a:p>
         </p:txBody>
@@ -5032,7 +6324,7 @@
                 </a:solidFill>
                 <a:latin typeface="Open Sans"/>
               </a:rPr>
-              <a:t>win-win, não trade-off</a:t>
+              <a:t>privacidade não é trade-off; é win-win</a:t>
             </a:r>
           </a:p>
         </p:txBody>
@@ -5257,7 +6549,7 @@
                 </a:solidFill>
                 <a:latin typeface="Open Sans"/>
               </a:rPr>
-              <a:t>todo o ciclo do dado</a:t>
+              <a:t>proteção em todo o ciclo de vida do dado</a:t>
             </a:r>
           </a:p>
         </p:txBody>
@@ -5482,7 +6774,7 @@
                 </a:solidFill>
                 <a:latin typeface="Open Sans"/>
               </a:rPr>
-              <a:t>titular no controle</a:t>
+              <a:t>o titular sabe e controla o tratamento</a:t>
             </a:r>
           </a:p>
         </p:txBody>
@@ -6145,7 +7437,7 @@
                 </a:solidFill>
                 <a:latin typeface="Open Sans"/>
               </a:rPr>
-              <a:t>ligar registros ao mesmo titular</a:t>
+              <a:t>ligar dois registros ao mesmo titular</a:t>
             </a:r>
           </a:p>
         </p:txBody>
@@ -6370,7 +7662,7 @@
                 </a:solidFill>
                 <a:latin typeface="Open Sans"/>
               </a:rPr>
-              <a:t>identificar por trás do pseudônimo</a:t>
+              <a:t>identificar quem está por trás de um pseudônimo</a:t>
             </a:r>
           </a:p>
         </p:txBody>
@@ -6595,7 +7887,7 @@
                 </a:solidFill>
                 <a:latin typeface="Open Sans"/>
               </a:rPr>
-              <a:t>prender o titular a algo que negaria</a:t>
+              <a:t>prender o titular a algo que ele negaria</a:t>
             </a:r>
           </a:p>
         </p:txBody>
@@ -6820,7 +8112,7 @@
                 </a:solidFill>
                 <a:latin typeface="Open Sans"/>
               </a:rPr>
-              <a:t>deduzir que um dado existe</a:t>
+              <a:t>deduzir que um dado existe (enumeração)</a:t>
             </a:r>
           </a:p>
         </p:txBody>
@@ -7045,7 +8337,7 @@
                 </a:solidFill>
                 <a:latin typeface="Open Sans"/>
               </a:rPr>
-              <a:t>vazar dado a quem não deveria</a:t>
+              <a:t>vazar dado a quem não deveria ter acesso</a:t>
             </a:r>
           </a:p>
         </p:txBody>
@@ -7225,7 +8517,7 @@
                 </a:solidFill>
                 <a:latin typeface="Open Sans"/>
               </a:rPr>
-              <a:t>Unawareness / Non-compliance</a:t>
+              <a:t>Unaware / Non-compliance</a:t>
             </a:r>
           </a:p>
         </p:txBody>
@@ -7270,7 +8562,7 @@
                 </a:solidFill>
                 <a:latin typeface="Open Sans"/>
               </a:rPr>
-              <a:t>titular não sabe / fere a lei</a:t>
+              <a:t>titular não sabe / o sistema fere a lei</a:t>
             </a:r>
           </a:p>
         </p:txBody>
@@ -7422,7 +8714,7 @@
                 </a:solidFill>
                 <a:latin typeface="Open Sans"/>
               </a:rPr>
-              <a:t>Controles de privacidade (PETs)</a:t>
+              <a:t>LINDDUN-per-element (exemplo)</a:t>
             </a:r>
           </a:p>
         </p:txBody>
@@ -7467,7 +8759,7 @@
                 </a:solidFill>
                 <a:latin typeface="Open Sans"/>
               </a:rPr>
-              <a:t>Da ameaça ao controle</a:t>
+              <a:t>Ameaça -&gt; controle/PET</a:t>
             </a:r>
           </a:p>
         </p:txBody>
@@ -7480,18 +8772,18 @@
         </p:nvSpPr>
         <p:spPr>
           <a:xfrm>
-            <a:off x="411480" y="1463040"/>
-            <a:ext cx="5468112" cy="2423160"/>
+            <a:off x="411480" y="1508760"/>
+            <a:ext cx="11384280" cy="749808"/>
           </a:xfrm>
           <a:prstGeom prst="roundRect">
             <a:avLst/>
           </a:prstGeom>
           <a:solidFill>
-            <a:srgbClr val="F5F5F5"/>
+            <a:srgbClr val="E8F0DB"/>
           </a:solidFill>
-          <a:ln w="19050">
+          <a:ln w="12700">
             <a:solidFill>
-              <a:srgbClr val="2D7A3D"/>
+              <a:srgbClr val="7CB342"/>
             </a:solidFill>
           </a:ln>
           <a:effectLst/>
@@ -7520,14 +8812,103 @@
       </p:sp>
       <p:sp>
         <p:nvSpPr>
-          <p:cNvPr id="6" name="TextBox 5"/>
+          <p:cNvPr id="6" name="Rounded Rectangle 5"/>
+          <p:cNvSpPr/>
+          <p:nvPr/>
+        </p:nvSpPr>
+        <p:spPr>
+          <a:xfrm>
+            <a:off x="502920" y="1600200"/>
+            <a:ext cx="1920240" cy="566927"/>
+          </a:xfrm>
+          <a:prstGeom prst="roundRect">
+            <a:avLst/>
+          </a:prstGeom>
+          <a:solidFill>
+            <a:srgbClr val="2D7A3D"/>
+          </a:solidFill>
+          <a:ln>
+            <a:noFill/>
+          </a:ln>
+          <a:effectLst/>
+        </p:spPr>
+        <p:style>
+          <a:lnRef idx="1">
+            <a:schemeClr val="accent1"/>
+          </a:lnRef>
+          <a:fillRef idx="3">
+            <a:schemeClr val="accent1"/>
+          </a:fillRef>
+          <a:effectRef idx="2">
+            <a:schemeClr val="accent1"/>
+          </a:effectRef>
+          <a:fontRef idx="minor">
+            <a:schemeClr val="lt1"/>
+          </a:fontRef>
+        </p:style>
+        <p:txBody>
+          <a:bodyPr rtlCol="0" anchor="ctr"/>
+          <a:lstStyle/>
+          <a:p>
+            <a:pPr algn="ctr"/>
+          </a:p>
+        </p:txBody>
+      </p:sp>
+      <p:sp>
+        <p:nvSpPr>
+          <p:cNvPr id="7" name="TextBox 6"/>
           <p:cNvSpPr txBox="1"/>
           <p:nvPr/>
         </p:nvSpPr>
         <p:spPr>
           <a:xfrm>
-            <a:off x="777240" y="1737360"/>
-            <a:ext cx="4754880" cy="548640"/>
+            <a:off x="502920" y="1709928"/>
+            <a:ext cx="1920240" cy="457200"/>
+          </a:xfrm>
+          <a:prstGeom prst="rect">
+            <a:avLst/>
+          </a:prstGeom>
+          <a:noFill/>
+        </p:spPr>
+        <p:txBody>
+          <a:bodyPr wrap="square" anchor="t" lIns="0" rIns="0" tIns="0" bIns="0">
+            <a:spAutoFit/>
+          </a:bodyPr>
+          <a:lstStyle/>
+          <a:p>
+            <a:pPr algn="ctr">
+              <a:lnSpc>
+                <a:spcPct val="100000"/>
+              </a:lnSpc>
+              <a:spcBef>
+                <a:spcPts val="0"/>
+              </a:spcBef>
+              <a:spcAft>
+                <a:spcPts val="600"/>
+              </a:spcAft>
+            </a:pPr>
+            <a:r>
+              <a:rPr sz="1800" b="1" i="0">
+                <a:solidFill>
+                  <a:srgbClr val="FFFFFF"/>
+                </a:solidFill>
+                <a:latin typeface="Open Sans"/>
+              </a:rPr>
+              <a:t>Logs</a:t>
+            </a:r>
+          </a:p>
+        </p:txBody>
+      </p:sp>
+      <p:sp>
+        <p:nvSpPr>
+          <p:cNvPr id="8" name="TextBox 7"/>
+          <p:cNvSpPr txBox="1"/>
+          <p:nvPr/>
+        </p:nvSpPr>
+        <p:spPr>
+          <a:xfrm>
+            <a:off x="2697480" y="1709928"/>
+            <a:ext cx="3657600" cy="457200"/>
           </a:xfrm>
           <a:prstGeom prst="rect">
             <a:avLst/>
@@ -7552,105 +8933,14 @@
               </a:spcAft>
             </a:pPr>
             <a:r>
-              <a:rPr sz="2200" b="1" i="0">
+              <a:rPr sz="1500" b="1" i="0">
                 <a:solidFill>
                   <a:srgbClr val="2D7A3D"/>
                 </a:solidFill>
                 <a:latin typeface="Open Sans"/>
               </a:rPr>
-              <a:t>Minimização</a:t>
-            </a:r>
-          </a:p>
-        </p:txBody>
-      </p:sp>
-      <p:sp>
-        <p:nvSpPr>
-          <p:cNvPr id="7" name="TextBox 6"/>
-          <p:cNvSpPr txBox="1"/>
-          <p:nvPr/>
-        </p:nvSpPr>
-        <p:spPr>
-          <a:xfrm>
-            <a:off x="777240" y="2377440"/>
-            <a:ext cx="4754880" cy="1371600"/>
-          </a:xfrm>
-          <a:prstGeom prst="rect">
-            <a:avLst/>
-          </a:prstGeom>
-          <a:noFill/>
-        </p:spPr>
-        <p:txBody>
-          <a:bodyPr wrap="square" anchor="t" lIns="0" rIns="0" tIns="0" bIns="0">
-            <a:spAutoFit/>
-          </a:bodyPr>
-          <a:lstStyle/>
-          <a:p>
-            <a:pPr algn="l">
-              <a:lnSpc>
-                <a:spcPct val="110000"/>
-              </a:lnSpc>
-              <a:spcBef>
-                <a:spcPts val="0"/>
-              </a:spcBef>
-              <a:spcAft>
-                <a:spcPts val="600"/>
-              </a:spcAft>
-            </a:pPr>
-            <a:r>
-              <a:rPr sz="1500" b="0" i="0">
-                <a:solidFill>
-                  <a:srgbClr val="212121"/>
-                </a:solidFill>
-                <a:latin typeface="Open Sans"/>
-              </a:rPr>
-              <a:t>só o dado necessário à finalidade</a:t>
-            </a:r>
-          </a:p>
-        </p:txBody>
-      </p:sp>
-      <p:sp>
-        <p:nvSpPr>
-          <p:cNvPr id="8" name="Rounded Rectangle 7"/>
-          <p:cNvSpPr/>
-          <p:nvPr/>
-        </p:nvSpPr>
-        <p:spPr>
-          <a:xfrm>
-            <a:off x="6309360" y="1463040"/>
-            <a:ext cx="5468112" cy="2423160"/>
-          </a:xfrm>
-          <a:prstGeom prst="roundRect">
-            <a:avLst/>
-          </a:prstGeom>
-          <a:solidFill>
-            <a:srgbClr val="F5F5F5"/>
-          </a:solidFill>
-          <a:ln w="19050">
-            <a:solidFill>
-              <a:srgbClr val="1976D2"/>
-            </a:solidFill>
-          </a:ln>
-          <a:effectLst/>
-        </p:spPr>
-        <p:style>
-          <a:lnRef idx="1">
-            <a:schemeClr val="accent1"/>
-          </a:lnRef>
-          <a:fillRef idx="3">
-            <a:schemeClr val="accent1"/>
-          </a:fillRef>
-          <a:effectRef idx="2">
-            <a:schemeClr val="accent1"/>
-          </a:effectRef>
-          <a:fontRef idx="minor">
-            <a:schemeClr val="lt1"/>
-          </a:fontRef>
-        </p:style>
-        <p:txBody>
-          <a:bodyPr rtlCol="0" anchor="ctr"/>
-          <a:lstStyle/>
-          <a:p>
-            <a:pPr algn="ctr"/>
+              <a:t>Identifiability</a:t>
+            </a:r>
           </a:p>
         </p:txBody>
       </p:sp>
@@ -7662,8 +8952,8 @@
         </p:nvSpPr>
         <p:spPr>
           <a:xfrm>
-            <a:off x="6675120" y="1737360"/>
-            <a:ext cx="4754880" cy="548640"/>
+            <a:off x="6492240" y="1728216"/>
+            <a:ext cx="5120640" cy="457200"/>
           </a:xfrm>
           <a:prstGeom prst="rect">
             <a:avLst/>
@@ -7688,27 +8978,117 @@
               </a:spcAft>
             </a:pPr>
             <a:r>
-              <a:rPr sz="2200" b="1" i="0">
-                <a:solidFill>
-                  <a:srgbClr val="1976D2"/>
+              <a:rPr sz="1300" b="0" i="0">
+                <a:solidFill>
+                  <a:srgbClr val="212121"/>
                 </a:solidFill>
                 <a:latin typeface="Open Sans"/>
               </a:rPr>
-              <a:t>Pseudonimização</a:t>
-            </a:r>
-          </a:p>
-        </p:txBody>
-      </p:sp>
-      <p:sp>
-        <p:nvSpPr>
-          <p:cNvPr id="10" name="TextBox 9"/>
+              <a:t>gravam CPF -&gt; pseudonimizar (user_id opaco)</a:t>
+            </a:r>
+          </a:p>
+        </p:txBody>
+      </p:sp>
+      <p:sp>
+        <p:nvSpPr>
+          <p:cNvPr id="10" name="Rounded Rectangle 9"/>
+          <p:cNvSpPr/>
+          <p:nvPr/>
+        </p:nvSpPr>
+        <p:spPr>
+          <a:xfrm>
+            <a:off x="411480" y="2313432"/>
+            <a:ext cx="11384280" cy="749808"/>
+          </a:xfrm>
+          <a:prstGeom prst="roundRect">
+            <a:avLst/>
+          </a:prstGeom>
+          <a:solidFill>
+            <a:srgbClr val="E8F0DB"/>
+          </a:solidFill>
+          <a:ln w="12700">
+            <a:solidFill>
+              <a:srgbClr val="7CB342"/>
+            </a:solidFill>
+          </a:ln>
+          <a:effectLst/>
+        </p:spPr>
+        <p:style>
+          <a:lnRef idx="1">
+            <a:schemeClr val="accent1"/>
+          </a:lnRef>
+          <a:fillRef idx="3">
+            <a:schemeClr val="accent1"/>
+          </a:fillRef>
+          <a:effectRef idx="2">
+            <a:schemeClr val="accent1"/>
+          </a:effectRef>
+          <a:fontRef idx="minor">
+            <a:schemeClr val="lt1"/>
+          </a:fontRef>
+        </p:style>
+        <p:txBody>
+          <a:bodyPr rtlCol="0" anchor="ctr"/>
+          <a:lstStyle/>
+          <a:p>
+            <a:pPr algn="ctr"/>
+          </a:p>
+        </p:txBody>
+      </p:sp>
+      <p:sp>
+        <p:nvSpPr>
+          <p:cNvPr id="11" name="Rounded Rectangle 10"/>
+          <p:cNvSpPr/>
+          <p:nvPr/>
+        </p:nvSpPr>
+        <p:spPr>
+          <a:xfrm>
+            <a:off x="502920" y="2404872"/>
+            <a:ext cx="1920240" cy="566927"/>
+          </a:xfrm>
+          <a:prstGeom prst="roundRect">
+            <a:avLst/>
+          </a:prstGeom>
+          <a:solidFill>
+            <a:srgbClr val="2D7A3D"/>
+          </a:solidFill>
+          <a:ln>
+            <a:noFill/>
+          </a:ln>
+          <a:effectLst/>
+        </p:spPr>
+        <p:style>
+          <a:lnRef idx="1">
+            <a:schemeClr val="accent1"/>
+          </a:lnRef>
+          <a:fillRef idx="3">
+            <a:schemeClr val="accent1"/>
+          </a:fillRef>
+          <a:effectRef idx="2">
+            <a:schemeClr val="accent1"/>
+          </a:effectRef>
+          <a:fontRef idx="minor">
+            <a:schemeClr val="lt1"/>
+          </a:fontRef>
+        </p:style>
+        <p:txBody>
+          <a:bodyPr rtlCol="0" anchor="ctr"/>
+          <a:lstStyle/>
+          <a:p>
+            <a:pPr algn="ctr"/>
+          </a:p>
+        </p:txBody>
+      </p:sp>
+      <p:sp>
+        <p:nvSpPr>
+          <p:cNvPr id="12" name="TextBox 11"/>
           <p:cNvSpPr txBox="1"/>
           <p:nvPr/>
         </p:nvSpPr>
         <p:spPr>
           <a:xfrm>
-            <a:off x="6675120" y="2377440"/>
-            <a:ext cx="4754880" cy="1371600"/>
+            <a:off x="502920" y="2514600"/>
+            <a:ext cx="1920240" cy="457200"/>
           </a:xfrm>
           <a:prstGeom prst="rect">
             <a:avLst/>
@@ -7721,9 +9101,9 @@
           </a:bodyPr>
           <a:lstStyle/>
           <a:p>
-            <a:pPr algn="l">
+            <a:pPr algn="ctr">
               <a:lnSpc>
-                <a:spcPct val="110000"/>
+                <a:spcPct val="100000"/>
               </a:lnSpc>
               <a:spcBef>
                 <a:spcPts val="0"/>
@@ -7733,73 +9113,27 @@
               </a:spcAft>
             </a:pPr>
             <a:r>
-              <a:rPr sz="1500" b="0" i="0">
-                <a:solidFill>
-                  <a:srgbClr val="212121"/>
+              <a:rPr sz="1800" b="1" i="0">
+                <a:solidFill>
+                  <a:srgbClr val="FFFFFF"/>
                 </a:solidFill>
                 <a:latin typeface="Open Sans"/>
               </a:rPr>
-              <a:t>id opaco no lugar de CPF/nome</a:t>
-            </a:r>
-          </a:p>
-        </p:txBody>
-      </p:sp>
-      <p:sp>
-        <p:nvSpPr>
-          <p:cNvPr id="11" name="Rounded Rectangle 10"/>
-          <p:cNvSpPr/>
-          <p:nvPr/>
-        </p:nvSpPr>
-        <p:spPr>
-          <a:xfrm>
-            <a:off x="411480" y="4069080"/>
-            <a:ext cx="5468112" cy="2423160"/>
-          </a:xfrm>
-          <a:prstGeom prst="roundRect">
-            <a:avLst/>
-          </a:prstGeom>
-          <a:solidFill>
-            <a:srgbClr val="F5F5F5"/>
-          </a:solidFill>
-          <a:ln w="19050">
-            <a:solidFill>
-              <a:srgbClr val="7CB342"/>
-            </a:solidFill>
-          </a:ln>
-          <a:effectLst/>
-        </p:spPr>
-        <p:style>
-          <a:lnRef idx="1">
-            <a:schemeClr val="accent1"/>
-          </a:lnRef>
-          <a:fillRef idx="3">
-            <a:schemeClr val="accent1"/>
-          </a:fillRef>
-          <a:effectRef idx="2">
-            <a:schemeClr val="accent1"/>
-          </a:effectRef>
-          <a:fontRef idx="minor">
-            <a:schemeClr val="lt1"/>
-          </a:fontRef>
-        </p:style>
-        <p:txBody>
-          <a:bodyPr rtlCol="0" anchor="ctr"/>
-          <a:lstStyle/>
-          <a:p>
-            <a:pPr algn="ctr"/>
-          </a:p>
-        </p:txBody>
-      </p:sp>
-      <p:sp>
-        <p:nvSpPr>
-          <p:cNvPr id="12" name="TextBox 11"/>
+              <a:t>Download de laudo</a:t>
+            </a:r>
+          </a:p>
+        </p:txBody>
+      </p:sp>
+      <p:sp>
+        <p:nvSpPr>
+          <p:cNvPr id="13" name="TextBox 12"/>
           <p:cNvSpPr txBox="1"/>
           <p:nvPr/>
         </p:nvSpPr>
         <p:spPr>
           <a:xfrm>
-            <a:off x="777240" y="4343400"/>
-            <a:ext cx="4754880" cy="548640"/>
+            <a:off x="2697480" y="2514600"/>
+            <a:ext cx="3657600" cy="457200"/>
           </a:xfrm>
           <a:prstGeom prst="rect">
             <a:avLst/>
@@ -7824,118 +9158,27 @@
               </a:spcAft>
             </a:pPr>
             <a:r>
-              <a:rPr sz="2200" b="1" i="0">
-                <a:solidFill>
-                  <a:srgbClr val="7CB342"/>
+              <a:rPr sz="1500" b="1" i="0">
+                <a:solidFill>
+                  <a:srgbClr val="2D7A3D"/>
                 </a:solidFill>
                 <a:latin typeface="Open Sans"/>
               </a:rPr>
-              <a:t>Anonimização</a:t>
-            </a:r>
-          </a:p>
-        </p:txBody>
-      </p:sp>
-      <p:sp>
-        <p:nvSpPr>
-          <p:cNvPr id="13" name="TextBox 12"/>
+              <a:t>Disclosure</a:t>
+            </a:r>
+          </a:p>
+        </p:txBody>
+      </p:sp>
+      <p:sp>
+        <p:nvSpPr>
+          <p:cNvPr id="14" name="TextBox 13"/>
           <p:cNvSpPr txBox="1"/>
           <p:nvPr/>
         </p:nvSpPr>
         <p:spPr>
           <a:xfrm>
-            <a:off x="777240" y="4983480"/>
-            <a:ext cx="4754880" cy="1371600"/>
-          </a:xfrm>
-          <a:prstGeom prst="rect">
-            <a:avLst/>
-          </a:prstGeom>
-          <a:noFill/>
-        </p:spPr>
-        <p:txBody>
-          <a:bodyPr wrap="square" anchor="t" lIns="0" rIns="0" tIns="0" bIns="0">
-            <a:spAutoFit/>
-          </a:bodyPr>
-          <a:lstStyle/>
-          <a:p>
-            <a:pPr algn="l">
-              <a:lnSpc>
-                <a:spcPct val="110000"/>
-              </a:lnSpc>
-              <a:spcBef>
-                <a:spcPts val="0"/>
-              </a:spcBef>
-              <a:spcAft>
-                <a:spcPts val="600"/>
-              </a:spcAft>
-            </a:pPr>
-            <a:r>
-              <a:rPr sz="1500" b="0" i="0">
-                <a:solidFill>
-                  <a:srgbClr val="212121"/>
-                </a:solidFill>
-                <a:latin typeface="Open Sans"/>
-              </a:rPr>
-              <a:t>titular não identificável (irreversível)</a:t>
-            </a:r>
-          </a:p>
-        </p:txBody>
-      </p:sp>
-      <p:sp>
-        <p:nvSpPr>
-          <p:cNvPr id="14" name="Rounded Rectangle 13"/>
-          <p:cNvSpPr/>
-          <p:nvPr/>
-        </p:nvSpPr>
-        <p:spPr>
-          <a:xfrm>
-            <a:off x="6309360" y="4069080"/>
-            <a:ext cx="5468112" cy="2423160"/>
-          </a:xfrm>
-          <a:prstGeom prst="roundRect">
-            <a:avLst/>
-          </a:prstGeom>
-          <a:solidFill>
-            <a:srgbClr val="F5F5F5"/>
-          </a:solidFill>
-          <a:ln w="19050">
-            <a:solidFill>
-              <a:srgbClr val="E65100"/>
-            </a:solidFill>
-          </a:ln>
-          <a:effectLst/>
-        </p:spPr>
-        <p:style>
-          <a:lnRef idx="1">
-            <a:schemeClr val="accent1"/>
-          </a:lnRef>
-          <a:fillRef idx="3">
-            <a:schemeClr val="accent1"/>
-          </a:fillRef>
-          <a:effectRef idx="2">
-            <a:schemeClr val="accent1"/>
-          </a:effectRef>
-          <a:fontRef idx="minor">
-            <a:schemeClr val="lt1"/>
-          </a:fontRef>
-        </p:style>
-        <p:txBody>
-          <a:bodyPr rtlCol="0" anchor="ctr"/>
-          <a:lstStyle/>
-          <a:p>
-            <a:pPr algn="ctr"/>
-          </a:p>
-        </p:txBody>
-      </p:sp>
-      <p:sp>
-        <p:nvSpPr>
-          <p:cNvPr id="15" name="TextBox 14"/>
-          <p:cNvSpPr txBox="1"/>
-          <p:nvPr/>
-        </p:nvSpPr>
-        <p:spPr>
-          <a:xfrm>
-            <a:off x="6675120" y="4343400"/>
-            <a:ext cx="4754880" cy="548640"/>
+            <a:off x="6492240" y="2532887"/>
+            <a:ext cx="5120640" cy="457200"/>
           </a:xfrm>
           <a:prstGeom prst="rect">
             <a:avLst/>
@@ -7960,27 +9203,117 @@
               </a:spcAft>
             </a:pPr>
             <a:r>
-              <a:rPr sz="2200" b="1" i="0">
-                <a:solidFill>
-                  <a:srgbClr val="E65100"/>
+              <a:rPr sz="1300" b="0" i="0">
+                <a:solidFill>
+                  <a:srgbClr val="212121"/>
                 </a:solidFill>
                 <a:latin typeface="Open Sans"/>
               </a:rPr>
-              <a:t>Retenção</a:t>
-            </a:r>
-          </a:p>
-        </p:txBody>
-      </p:sp>
-      <p:sp>
-        <p:nvSpPr>
-          <p:cNvPr id="16" name="TextBox 15"/>
+              <a:t>IDOR -&gt; validar ownership no servidor</a:t>
+            </a:r>
+          </a:p>
+        </p:txBody>
+      </p:sp>
+      <p:sp>
+        <p:nvSpPr>
+          <p:cNvPr id="15" name="Rounded Rectangle 14"/>
+          <p:cNvSpPr/>
+          <p:nvPr/>
+        </p:nvSpPr>
+        <p:spPr>
+          <a:xfrm>
+            <a:off x="411480" y="3118103"/>
+            <a:ext cx="11384280" cy="749808"/>
+          </a:xfrm>
+          <a:prstGeom prst="roundRect">
+            <a:avLst/>
+          </a:prstGeom>
+          <a:solidFill>
+            <a:srgbClr val="E8F0DB"/>
+          </a:solidFill>
+          <a:ln w="12700">
+            <a:solidFill>
+              <a:srgbClr val="7CB342"/>
+            </a:solidFill>
+          </a:ln>
+          <a:effectLst/>
+        </p:spPr>
+        <p:style>
+          <a:lnRef idx="1">
+            <a:schemeClr val="accent1"/>
+          </a:lnRef>
+          <a:fillRef idx="3">
+            <a:schemeClr val="accent1"/>
+          </a:fillRef>
+          <a:effectRef idx="2">
+            <a:schemeClr val="accent1"/>
+          </a:effectRef>
+          <a:fontRef idx="minor">
+            <a:schemeClr val="lt1"/>
+          </a:fontRef>
+        </p:style>
+        <p:txBody>
+          <a:bodyPr rtlCol="0" anchor="ctr"/>
+          <a:lstStyle/>
+          <a:p>
+            <a:pPr algn="ctr"/>
+          </a:p>
+        </p:txBody>
+      </p:sp>
+      <p:sp>
+        <p:nvSpPr>
+          <p:cNvPr id="16" name="Rounded Rectangle 15"/>
+          <p:cNvSpPr/>
+          <p:nvPr/>
+        </p:nvSpPr>
+        <p:spPr>
+          <a:xfrm>
+            <a:off x="502920" y="3209544"/>
+            <a:ext cx="1920240" cy="566927"/>
+          </a:xfrm>
+          <a:prstGeom prst="roundRect">
+            <a:avLst/>
+          </a:prstGeom>
+          <a:solidFill>
+            <a:srgbClr val="2D7A3D"/>
+          </a:solidFill>
+          <a:ln>
+            <a:noFill/>
+          </a:ln>
+          <a:effectLst/>
+        </p:spPr>
+        <p:style>
+          <a:lnRef idx="1">
+            <a:schemeClr val="accent1"/>
+          </a:lnRef>
+          <a:fillRef idx="3">
+            <a:schemeClr val="accent1"/>
+          </a:fillRef>
+          <a:effectRef idx="2">
+            <a:schemeClr val="accent1"/>
+          </a:effectRef>
+          <a:fontRef idx="minor">
+            <a:schemeClr val="lt1"/>
+          </a:fontRef>
+        </p:style>
+        <p:txBody>
+          <a:bodyPr rtlCol="0" anchor="ctr"/>
+          <a:lstStyle/>
+          <a:p>
+            <a:pPr algn="ctr"/>
+          </a:p>
+        </p:txBody>
+      </p:sp>
+      <p:sp>
+        <p:nvSpPr>
+          <p:cNvPr id="17" name="TextBox 16"/>
           <p:cNvSpPr txBox="1"/>
           <p:nvPr/>
         </p:nvSpPr>
         <p:spPr>
           <a:xfrm>
-            <a:off x="6675120" y="4983480"/>
-            <a:ext cx="4754880" cy="1371600"/>
+            <a:off x="502920" y="3319272"/>
+            <a:ext cx="1920240" cy="457200"/>
           </a:xfrm>
           <a:prstGeom prst="rect">
             <a:avLst/>
@@ -7993,9 +9326,9 @@
           </a:bodyPr>
           <a:lstStyle/>
           <a:p>
-            <a:pPr algn="l">
+            <a:pPr algn="ctr">
               <a:lnSpc>
-                <a:spcPct val="110000"/>
+                <a:spcPct val="100000"/>
               </a:lnSpc>
               <a:spcBef>
                 <a:spcPts val="0"/>
@@ -8005,20 +9338,335 @@
               </a:spcAft>
             </a:pPr>
             <a:r>
-              <a:rPr sz="1500" b="0" i="0">
-                <a:solidFill>
-                  <a:srgbClr val="212121"/>
+              <a:rPr sz="1800" b="1" i="0">
+                <a:solidFill>
+                  <a:srgbClr val="FFFFFF"/>
                 </a:solidFill>
                 <a:latin typeface="Open Sans"/>
               </a:rPr>
-              <a:t>apagar/anonimizar após o prazo</a:t>
-            </a:r>
-          </a:p>
-        </p:txBody>
-      </p:sp>
-      <p:sp>
-        <p:nvSpPr>
-          <p:cNvPr id="17" name="TextBox 16"/>
+              <a:t>Cadastro</a:t>
+            </a:r>
+          </a:p>
+        </p:txBody>
+      </p:sp>
+      <p:sp>
+        <p:nvSpPr>
+          <p:cNvPr id="18" name="TextBox 17"/>
+          <p:cNvSpPr txBox="1"/>
+          <p:nvPr/>
+        </p:nvSpPr>
+        <p:spPr>
+          <a:xfrm>
+            <a:off x="2697480" y="3319272"/>
+            <a:ext cx="3657600" cy="457200"/>
+          </a:xfrm>
+          <a:prstGeom prst="rect">
+            <a:avLst/>
+          </a:prstGeom>
+          <a:noFill/>
+        </p:spPr>
+        <p:txBody>
+          <a:bodyPr wrap="square" anchor="t" lIns="0" rIns="0" tIns="0" bIns="0">
+            <a:spAutoFit/>
+          </a:bodyPr>
+          <a:lstStyle/>
+          <a:p>
+            <a:pPr algn="l">
+              <a:lnSpc>
+                <a:spcPct val="100000"/>
+              </a:lnSpc>
+              <a:spcBef>
+                <a:spcPts val="0"/>
+              </a:spcBef>
+              <a:spcAft>
+                <a:spcPts val="600"/>
+              </a:spcAft>
+            </a:pPr>
+            <a:r>
+              <a:rPr sz="1500" b="1" i="0">
+                <a:solidFill>
+                  <a:srgbClr val="2D7A3D"/>
+                </a:solidFill>
+                <a:latin typeface="Open Sans"/>
+              </a:rPr>
+              <a:t>Unawareness</a:t>
+            </a:r>
+          </a:p>
+        </p:txBody>
+      </p:sp>
+      <p:sp>
+        <p:nvSpPr>
+          <p:cNvPr id="19" name="TextBox 18"/>
+          <p:cNvSpPr txBox="1"/>
+          <p:nvPr/>
+        </p:nvSpPr>
+        <p:spPr>
+          <a:xfrm>
+            <a:off x="6492240" y="3337559"/>
+            <a:ext cx="5120640" cy="457200"/>
+          </a:xfrm>
+          <a:prstGeom prst="rect">
+            <a:avLst/>
+          </a:prstGeom>
+          <a:noFill/>
+        </p:spPr>
+        <p:txBody>
+          <a:bodyPr wrap="square" anchor="t" lIns="0" rIns="0" tIns="0" bIns="0">
+            <a:spAutoFit/>
+          </a:bodyPr>
+          <a:lstStyle/>
+          <a:p>
+            <a:pPr algn="l">
+              <a:lnSpc>
+                <a:spcPct val="100000"/>
+              </a:lnSpc>
+              <a:spcBef>
+                <a:spcPts val="0"/>
+              </a:spcBef>
+              <a:spcAft>
+                <a:spcPts val="600"/>
+              </a:spcAft>
+            </a:pPr>
+            <a:r>
+              <a:rPr sz="1300" b="0" i="0">
+                <a:solidFill>
+                  <a:srgbClr val="212121"/>
+                </a:solidFill>
+                <a:latin typeface="Open Sans"/>
+              </a:rPr>
+              <a:t>coleta religião sem finalidade -&gt; minimizar</a:t>
+            </a:r>
+          </a:p>
+        </p:txBody>
+      </p:sp>
+      <p:sp>
+        <p:nvSpPr>
+          <p:cNvPr id="20" name="Rounded Rectangle 19"/>
+          <p:cNvSpPr/>
+          <p:nvPr/>
+        </p:nvSpPr>
+        <p:spPr>
+          <a:xfrm>
+            <a:off x="411480" y="3922775"/>
+            <a:ext cx="11384280" cy="749808"/>
+          </a:xfrm>
+          <a:prstGeom prst="roundRect">
+            <a:avLst/>
+          </a:prstGeom>
+          <a:solidFill>
+            <a:srgbClr val="E8F0DB"/>
+          </a:solidFill>
+          <a:ln w="12700">
+            <a:solidFill>
+              <a:srgbClr val="7CB342"/>
+            </a:solidFill>
+          </a:ln>
+          <a:effectLst/>
+        </p:spPr>
+        <p:style>
+          <a:lnRef idx="1">
+            <a:schemeClr val="accent1"/>
+          </a:lnRef>
+          <a:fillRef idx="3">
+            <a:schemeClr val="accent1"/>
+          </a:fillRef>
+          <a:effectRef idx="2">
+            <a:schemeClr val="accent1"/>
+          </a:effectRef>
+          <a:fontRef idx="minor">
+            <a:schemeClr val="lt1"/>
+          </a:fontRef>
+        </p:style>
+        <p:txBody>
+          <a:bodyPr rtlCol="0" anchor="ctr"/>
+          <a:lstStyle/>
+          <a:p>
+            <a:pPr algn="ctr"/>
+          </a:p>
+        </p:txBody>
+      </p:sp>
+      <p:sp>
+        <p:nvSpPr>
+          <p:cNvPr id="21" name="Rounded Rectangle 20"/>
+          <p:cNvSpPr/>
+          <p:nvPr/>
+        </p:nvSpPr>
+        <p:spPr>
+          <a:xfrm>
+            <a:off x="502920" y="4014215"/>
+            <a:ext cx="1920240" cy="566927"/>
+          </a:xfrm>
+          <a:prstGeom prst="roundRect">
+            <a:avLst/>
+          </a:prstGeom>
+          <a:solidFill>
+            <a:srgbClr val="2D7A3D"/>
+          </a:solidFill>
+          <a:ln>
+            <a:noFill/>
+          </a:ln>
+          <a:effectLst/>
+        </p:spPr>
+        <p:style>
+          <a:lnRef idx="1">
+            <a:schemeClr val="accent1"/>
+          </a:lnRef>
+          <a:fillRef idx="3">
+            <a:schemeClr val="accent1"/>
+          </a:fillRef>
+          <a:effectRef idx="2">
+            <a:schemeClr val="accent1"/>
+          </a:effectRef>
+          <a:fontRef idx="minor">
+            <a:schemeClr val="lt1"/>
+          </a:fontRef>
+        </p:style>
+        <p:txBody>
+          <a:bodyPr rtlCol="0" anchor="ctr"/>
+          <a:lstStyle/>
+          <a:p>
+            <a:pPr algn="ctr"/>
+          </a:p>
+        </p:txBody>
+      </p:sp>
+      <p:sp>
+        <p:nvSpPr>
+          <p:cNvPr id="22" name="TextBox 21"/>
+          <p:cNvSpPr txBox="1"/>
+          <p:nvPr/>
+        </p:nvSpPr>
+        <p:spPr>
+          <a:xfrm>
+            <a:off x="502920" y="4123943"/>
+            <a:ext cx="1920240" cy="457200"/>
+          </a:xfrm>
+          <a:prstGeom prst="rect">
+            <a:avLst/>
+          </a:prstGeom>
+          <a:noFill/>
+        </p:spPr>
+        <p:txBody>
+          <a:bodyPr wrap="square" anchor="t" lIns="0" rIns="0" tIns="0" bIns="0">
+            <a:spAutoFit/>
+          </a:bodyPr>
+          <a:lstStyle/>
+          <a:p>
+            <a:pPr algn="ctr">
+              <a:lnSpc>
+                <a:spcPct val="100000"/>
+              </a:lnSpc>
+              <a:spcBef>
+                <a:spcPts val="0"/>
+              </a:spcBef>
+              <a:spcAft>
+                <a:spcPts val="600"/>
+              </a:spcAft>
+            </a:pPr>
+            <a:r>
+              <a:rPr sz="1800" b="1" i="0">
+                <a:solidFill>
+                  <a:srgbClr val="FFFFFF"/>
+                </a:solidFill>
+                <a:latin typeface="Open Sans"/>
+              </a:rPr>
+              <a:t>Banco</a:t>
+            </a:r>
+          </a:p>
+        </p:txBody>
+      </p:sp>
+      <p:sp>
+        <p:nvSpPr>
+          <p:cNvPr id="23" name="TextBox 22"/>
+          <p:cNvSpPr txBox="1"/>
+          <p:nvPr/>
+        </p:nvSpPr>
+        <p:spPr>
+          <a:xfrm>
+            <a:off x="2697480" y="4123943"/>
+            <a:ext cx="3657600" cy="457200"/>
+          </a:xfrm>
+          <a:prstGeom prst="rect">
+            <a:avLst/>
+          </a:prstGeom>
+          <a:noFill/>
+        </p:spPr>
+        <p:txBody>
+          <a:bodyPr wrap="square" anchor="t" lIns="0" rIns="0" tIns="0" bIns="0">
+            <a:spAutoFit/>
+          </a:bodyPr>
+          <a:lstStyle/>
+          <a:p>
+            <a:pPr algn="l">
+              <a:lnSpc>
+                <a:spcPct val="100000"/>
+              </a:lnSpc>
+              <a:spcBef>
+                <a:spcPts val="0"/>
+              </a:spcBef>
+              <a:spcAft>
+                <a:spcPts val="600"/>
+              </a:spcAft>
+            </a:pPr>
+            <a:r>
+              <a:rPr sz="1500" b="1" i="0">
+                <a:solidFill>
+                  <a:srgbClr val="2D7A3D"/>
+                </a:solidFill>
+                <a:latin typeface="Open Sans"/>
+              </a:rPr>
+              <a:t>Non-compliance</a:t>
+            </a:r>
+          </a:p>
+        </p:txBody>
+      </p:sp>
+      <p:sp>
+        <p:nvSpPr>
+          <p:cNvPr id="24" name="TextBox 23"/>
+          <p:cNvSpPr txBox="1"/>
+          <p:nvPr/>
+        </p:nvSpPr>
+        <p:spPr>
+          <a:xfrm>
+            <a:off x="6492240" y="4142231"/>
+            <a:ext cx="5120640" cy="457200"/>
+          </a:xfrm>
+          <a:prstGeom prst="rect">
+            <a:avLst/>
+          </a:prstGeom>
+          <a:noFill/>
+        </p:spPr>
+        <p:txBody>
+          <a:bodyPr wrap="square" anchor="t" lIns="0" rIns="0" tIns="0" bIns="0">
+            <a:spAutoFit/>
+          </a:bodyPr>
+          <a:lstStyle/>
+          <a:p>
+            <a:pPr algn="l">
+              <a:lnSpc>
+                <a:spcPct val="100000"/>
+              </a:lnSpc>
+              <a:spcBef>
+                <a:spcPts val="0"/>
+              </a:spcBef>
+              <a:spcAft>
+                <a:spcPts val="600"/>
+              </a:spcAft>
+            </a:pPr>
+            <a:r>
+              <a:rPr sz="1300" b="0" i="0">
+                <a:solidFill>
+                  <a:srgbClr val="212121"/>
+                </a:solidFill>
+                <a:latin typeface="Open Sans"/>
+              </a:rPr>
+              <a:t>retenção infinita -&gt; política + anonimização</a:t>
+            </a:r>
+          </a:p>
+        </p:txBody>
+      </p:sp>
+      <p:sp>
+        <p:nvSpPr>
+          <p:cNvPr id="25" name="TextBox 24"/>
           <p:cNvSpPr txBox="1"/>
           <p:nvPr/>
         </p:nvSpPr>
@@ -8163,7 +9811,7 @@
                 </a:solidFill>
                 <a:latin typeface="Open Sans"/>
               </a:rPr>
-              <a:t>RIPD / DPIA (LGPD art. 38)</a:t>
+              <a:t>Controles de privacidade (PETs)</a:t>
             </a:r>
           </a:p>
         </p:txBody>
@@ -8208,21 +9856,67 @@
                 </a:solidFill>
                 <a:latin typeface="Open Sans"/>
               </a:rPr>
-              <a:t>O LINDDUN alimenta o relatório</a:t>
-            </a:r>
-          </a:p>
-        </p:txBody>
-      </p:sp>
-      <p:sp>
-        <p:nvSpPr>
-          <p:cNvPr id="5" name="TextBox 4"/>
+              <a:t>Da ameaça ao controle</a:t>
+            </a:r>
+          </a:p>
+        </p:txBody>
+      </p:sp>
+      <p:sp>
+        <p:nvSpPr>
+          <p:cNvPr id="5" name="Rounded Rectangle 4"/>
+          <p:cNvSpPr/>
+          <p:nvPr/>
+        </p:nvSpPr>
+        <p:spPr>
+          <a:xfrm>
+            <a:off x="411480" y="1463040"/>
+            <a:ext cx="5468112" cy="2423160"/>
+          </a:xfrm>
+          <a:prstGeom prst="roundRect">
+            <a:avLst/>
+          </a:prstGeom>
+          <a:solidFill>
+            <a:srgbClr val="F5F5F5"/>
+          </a:solidFill>
+          <a:ln w="19050">
+            <a:solidFill>
+              <a:srgbClr val="2D7A3D"/>
+            </a:solidFill>
+          </a:ln>
+          <a:effectLst/>
+        </p:spPr>
+        <p:style>
+          <a:lnRef idx="1">
+            <a:schemeClr val="accent1"/>
+          </a:lnRef>
+          <a:fillRef idx="3">
+            <a:schemeClr val="accent1"/>
+          </a:fillRef>
+          <a:effectRef idx="2">
+            <a:schemeClr val="accent1"/>
+          </a:effectRef>
+          <a:fontRef idx="minor">
+            <a:schemeClr val="lt1"/>
+          </a:fontRef>
+        </p:style>
+        <p:txBody>
+          <a:bodyPr rtlCol="0" anchor="ctr"/>
+          <a:lstStyle/>
+          <a:p>
+            <a:pPr algn="ctr"/>
+          </a:p>
+        </p:txBody>
+      </p:sp>
+      <p:sp>
+        <p:nvSpPr>
+          <p:cNvPr id="6" name="TextBox 5"/>
           <p:cNvSpPr txBox="1"/>
           <p:nvPr/>
         </p:nvSpPr>
         <p:spPr>
           <a:xfrm>
-            <a:off x="548640" y="1737360"/>
-            <a:ext cx="1371600" cy="1371600"/>
+            <a:off x="777240" y="1737360"/>
+            <a:ext cx="4754880" cy="548640"/>
           </a:xfrm>
           <a:prstGeom prst="rect">
             <a:avLst/>
@@ -8247,27 +9941,27 @@
               </a:spcAft>
             </a:pPr>
             <a:r>
-              <a:rPr sz="13000" b="1" i="0">
-                <a:solidFill>
-                  <a:srgbClr val="7CB342"/>
+              <a:rPr sz="2200" b="1" i="0">
+                <a:solidFill>
+                  <a:srgbClr val="2D7A3D"/>
                 </a:solidFill>
                 <a:latin typeface="Open Sans"/>
               </a:rPr>
-              <a:t>“</a:t>
-            </a:r>
-          </a:p>
-        </p:txBody>
-      </p:sp>
-      <p:sp>
-        <p:nvSpPr>
-          <p:cNvPr id="6" name="TextBox 5"/>
+              <a:t>Minimização</a:t>
+            </a:r>
+          </a:p>
+        </p:txBody>
+      </p:sp>
+      <p:sp>
+        <p:nvSpPr>
+          <p:cNvPr id="7" name="TextBox 6"/>
           <p:cNvSpPr txBox="1"/>
           <p:nvPr/>
         </p:nvSpPr>
         <p:spPr>
           <a:xfrm>
-            <a:off x="1828800" y="2194560"/>
-            <a:ext cx="9601200" cy="2286000"/>
+            <a:off x="777240" y="2377440"/>
+            <a:ext cx="4754880" cy="1371600"/>
           </a:xfrm>
           <a:prstGeom prst="rect">
             <a:avLst/>
@@ -8282,7 +9976,7 @@
           <a:p>
             <a:pPr algn="l">
               <a:lnSpc>
-                <a:spcPct val="115000"/>
+                <a:spcPct val="110000"/>
               </a:lnSpc>
               <a:spcBef>
                 <a:spcPts val="0"/>
@@ -8292,27 +9986,73 @@
               </a:spcAft>
             </a:pPr>
             <a:r>
-              <a:rPr sz="3000" b="0" i="1">
-                <a:solidFill>
-                  <a:srgbClr val="2D7A3D"/>
+              <a:rPr sz="1500" b="0" i="0">
+                <a:solidFill>
+                  <a:srgbClr val="212121"/>
                 </a:solidFill>
                 <a:latin typeface="Open Sans"/>
               </a:rPr>
-              <a:t>Cada ameaça de privacidade identificada no LINDDUN, com seu risco e a medida mitigadora, compõe o Relatório de Impacto à Proteção de Dados.</a:t>
-            </a:r>
-          </a:p>
-        </p:txBody>
-      </p:sp>
-      <p:sp>
-        <p:nvSpPr>
-          <p:cNvPr id="7" name="TextBox 6"/>
+              <a:t>coletar só o dado necessário à finalidade (art. 6)</a:t>
+            </a:r>
+          </a:p>
+        </p:txBody>
+      </p:sp>
+      <p:sp>
+        <p:nvSpPr>
+          <p:cNvPr id="8" name="Rounded Rectangle 7"/>
+          <p:cNvSpPr/>
+          <p:nvPr/>
+        </p:nvSpPr>
+        <p:spPr>
+          <a:xfrm>
+            <a:off x="6309360" y="1463040"/>
+            <a:ext cx="5468112" cy="2423160"/>
+          </a:xfrm>
+          <a:prstGeom prst="roundRect">
+            <a:avLst/>
+          </a:prstGeom>
+          <a:solidFill>
+            <a:srgbClr val="F5F5F5"/>
+          </a:solidFill>
+          <a:ln w="19050">
+            <a:solidFill>
+              <a:srgbClr val="1976D2"/>
+            </a:solidFill>
+          </a:ln>
+          <a:effectLst/>
+        </p:spPr>
+        <p:style>
+          <a:lnRef idx="1">
+            <a:schemeClr val="accent1"/>
+          </a:lnRef>
+          <a:fillRef idx="3">
+            <a:schemeClr val="accent1"/>
+          </a:fillRef>
+          <a:effectRef idx="2">
+            <a:schemeClr val="accent1"/>
+          </a:effectRef>
+          <a:fontRef idx="minor">
+            <a:schemeClr val="lt1"/>
+          </a:fontRef>
+        </p:style>
+        <p:txBody>
+          <a:bodyPr rtlCol="0" anchor="ctr"/>
+          <a:lstStyle/>
+          <a:p>
+            <a:pPr algn="ctr"/>
+          </a:p>
+        </p:txBody>
+      </p:sp>
+      <p:sp>
+        <p:nvSpPr>
+          <p:cNvPr id="9" name="TextBox 8"/>
           <p:cNvSpPr txBox="1"/>
           <p:nvPr/>
         </p:nvSpPr>
         <p:spPr>
           <a:xfrm>
-            <a:off x="1828800" y="4937760"/>
-            <a:ext cx="9601200" cy="548640"/>
+            <a:off x="6675120" y="1737360"/>
+            <a:ext cx="4754880" cy="548640"/>
           </a:xfrm>
           <a:prstGeom prst="rect">
             <a:avLst/>
@@ -8337,36 +10077,83 @@
               </a:spcAft>
             </a:pPr>
             <a:r>
-              <a:rPr sz="1800" b="1" i="0">
-                <a:solidFill>
-                  <a:srgbClr val="616161"/>
+              <a:rPr sz="2200" b="1" i="0">
+                <a:solidFill>
+                  <a:srgbClr val="1976D2"/>
                 </a:solidFill>
                 <a:latin typeface="Open Sans"/>
               </a:rPr>
-              <a:t>LGPD art. 38 · tratamentos de alto risco</a:t>
-            </a:r>
-          </a:p>
-        </p:txBody>
-      </p:sp>
-      <p:sp>
-        <p:nvSpPr>
-          <p:cNvPr id="8" name="Rectangle 7"/>
+              <a:t>Pseudonimização</a:t>
+            </a:r>
+          </a:p>
+        </p:txBody>
+      </p:sp>
+      <p:sp>
+        <p:nvSpPr>
+          <p:cNvPr id="10" name="TextBox 9"/>
+          <p:cNvSpPr txBox="1"/>
+          <p:nvPr/>
+        </p:nvSpPr>
+        <p:spPr>
+          <a:xfrm>
+            <a:off x="6675120" y="2377440"/>
+            <a:ext cx="4754880" cy="1371600"/>
+          </a:xfrm>
+          <a:prstGeom prst="rect">
+            <a:avLst/>
+          </a:prstGeom>
+          <a:noFill/>
+        </p:spPr>
+        <p:txBody>
+          <a:bodyPr wrap="square" anchor="t" lIns="0" rIns="0" tIns="0" bIns="0">
+            <a:spAutoFit/>
+          </a:bodyPr>
+          <a:lstStyle/>
+          <a:p>
+            <a:pPr algn="l">
+              <a:lnSpc>
+                <a:spcPct val="110000"/>
+              </a:lnSpc>
+              <a:spcBef>
+                <a:spcPts val="0"/>
+              </a:spcBef>
+              <a:spcAft>
+                <a:spcPts val="600"/>
+              </a:spcAft>
+            </a:pPr>
+            <a:r>
+              <a:rPr sz="1500" b="0" i="0">
+                <a:solidFill>
+                  <a:srgbClr val="212121"/>
+                </a:solidFill>
+                <a:latin typeface="Open Sans"/>
+              </a:rPr>
+              <a:t>id opaco no lugar de CPF/nome (reversível com chave)</a:t>
+            </a:r>
+          </a:p>
+        </p:txBody>
+      </p:sp>
+      <p:sp>
+        <p:nvSpPr>
+          <p:cNvPr id="11" name="Rounded Rectangle 10"/>
           <p:cNvSpPr/>
           <p:nvPr/>
         </p:nvSpPr>
         <p:spPr>
           <a:xfrm>
-            <a:off x="1828800" y="5532120"/>
-            <a:ext cx="1828800" cy="25400"/>
-          </a:xfrm>
-          <a:prstGeom prst="rect">
+            <a:off x="411480" y="4069080"/>
+            <a:ext cx="5468112" cy="2423160"/>
+          </a:xfrm>
+          <a:prstGeom prst="roundRect">
             <a:avLst/>
           </a:prstGeom>
           <a:solidFill>
-            <a:srgbClr val="7CB342"/>
+            <a:srgbClr val="F5F5F5"/>
           </a:solidFill>
-          <a:ln>
-            <a:noFill/>
+          <a:ln w="19050">
+            <a:solidFill>
+              <a:srgbClr val="7CB342"/>
+            </a:solidFill>
           </a:ln>
           <a:effectLst/>
         </p:spPr>
@@ -8394,7 +10181,233 @@
       </p:sp>
       <p:sp>
         <p:nvSpPr>
-          <p:cNvPr id="9" name="TextBox 8"/>
+          <p:cNvPr id="12" name="TextBox 11"/>
+          <p:cNvSpPr txBox="1"/>
+          <p:nvPr/>
+        </p:nvSpPr>
+        <p:spPr>
+          <a:xfrm>
+            <a:off x="777240" y="4343400"/>
+            <a:ext cx="4754880" cy="548640"/>
+          </a:xfrm>
+          <a:prstGeom prst="rect">
+            <a:avLst/>
+          </a:prstGeom>
+          <a:noFill/>
+        </p:spPr>
+        <p:txBody>
+          <a:bodyPr wrap="square" anchor="t" lIns="0" rIns="0" tIns="0" bIns="0">
+            <a:spAutoFit/>
+          </a:bodyPr>
+          <a:lstStyle/>
+          <a:p>
+            <a:pPr algn="l">
+              <a:lnSpc>
+                <a:spcPct val="100000"/>
+              </a:lnSpc>
+              <a:spcBef>
+                <a:spcPts val="0"/>
+              </a:spcBef>
+              <a:spcAft>
+                <a:spcPts val="600"/>
+              </a:spcAft>
+            </a:pPr>
+            <a:r>
+              <a:rPr sz="2200" b="1" i="0">
+                <a:solidFill>
+                  <a:srgbClr val="7CB342"/>
+                </a:solidFill>
+                <a:latin typeface="Open Sans"/>
+              </a:rPr>
+              <a:t>Anonimização</a:t>
+            </a:r>
+          </a:p>
+        </p:txBody>
+      </p:sp>
+      <p:sp>
+        <p:nvSpPr>
+          <p:cNvPr id="13" name="TextBox 12"/>
+          <p:cNvSpPr txBox="1"/>
+          <p:nvPr/>
+        </p:nvSpPr>
+        <p:spPr>
+          <a:xfrm>
+            <a:off x="777240" y="4983480"/>
+            <a:ext cx="4754880" cy="1371600"/>
+          </a:xfrm>
+          <a:prstGeom prst="rect">
+            <a:avLst/>
+          </a:prstGeom>
+          <a:noFill/>
+        </p:spPr>
+        <p:txBody>
+          <a:bodyPr wrap="square" anchor="t" lIns="0" rIns="0" tIns="0" bIns="0">
+            <a:spAutoFit/>
+          </a:bodyPr>
+          <a:lstStyle/>
+          <a:p>
+            <a:pPr algn="l">
+              <a:lnSpc>
+                <a:spcPct val="110000"/>
+              </a:lnSpc>
+              <a:spcBef>
+                <a:spcPts val="0"/>
+              </a:spcBef>
+              <a:spcAft>
+                <a:spcPts val="600"/>
+              </a:spcAft>
+            </a:pPr>
+            <a:r>
+              <a:rPr sz="1500" b="0" i="0">
+                <a:solidFill>
+                  <a:srgbClr val="212121"/>
+                </a:solidFill>
+                <a:latin typeface="Open Sans"/>
+              </a:rPr>
+              <a:t>titular não identificável (irreversível)</a:t>
+            </a:r>
+          </a:p>
+        </p:txBody>
+      </p:sp>
+      <p:sp>
+        <p:nvSpPr>
+          <p:cNvPr id="14" name="Rounded Rectangle 13"/>
+          <p:cNvSpPr/>
+          <p:nvPr/>
+        </p:nvSpPr>
+        <p:spPr>
+          <a:xfrm>
+            <a:off x="6309360" y="4069080"/>
+            <a:ext cx="5468112" cy="2423160"/>
+          </a:xfrm>
+          <a:prstGeom prst="roundRect">
+            <a:avLst/>
+          </a:prstGeom>
+          <a:solidFill>
+            <a:srgbClr val="F5F5F5"/>
+          </a:solidFill>
+          <a:ln w="19050">
+            <a:solidFill>
+              <a:srgbClr val="E65100"/>
+            </a:solidFill>
+          </a:ln>
+          <a:effectLst/>
+        </p:spPr>
+        <p:style>
+          <a:lnRef idx="1">
+            <a:schemeClr val="accent1"/>
+          </a:lnRef>
+          <a:fillRef idx="3">
+            <a:schemeClr val="accent1"/>
+          </a:fillRef>
+          <a:effectRef idx="2">
+            <a:schemeClr val="accent1"/>
+          </a:effectRef>
+          <a:fontRef idx="minor">
+            <a:schemeClr val="lt1"/>
+          </a:fontRef>
+        </p:style>
+        <p:txBody>
+          <a:bodyPr rtlCol="0" anchor="ctr"/>
+          <a:lstStyle/>
+          <a:p>
+            <a:pPr algn="ctr"/>
+          </a:p>
+        </p:txBody>
+      </p:sp>
+      <p:sp>
+        <p:nvSpPr>
+          <p:cNvPr id="15" name="TextBox 14"/>
+          <p:cNvSpPr txBox="1"/>
+          <p:nvPr/>
+        </p:nvSpPr>
+        <p:spPr>
+          <a:xfrm>
+            <a:off x="6675120" y="4343400"/>
+            <a:ext cx="4754880" cy="548640"/>
+          </a:xfrm>
+          <a:prstGeom prst="rect">
+            <a:avLst/>
+          </a:prstGeom>
+          <a:noFill/>
+        </p:spPr>
+        <p:txBody>
+          <a:bodyPr wrap="square" anchor="t" lIns="0" rIns="0" tIns="0" bIns="0">
+            <a:spAutoFit/>
+          </a:bodyPr>
+          <a:lstStyle/>
+          <a:p>
+            <a:pPr algn="l">
+              <a:lnSpc>
+                <a:spcPct val="100000"/>
+              </a:lnSpc>
+              <a:spcBef>
+                <a:spcPts val="0"/>
+              </a:spcBef>
+              <a:spcAft>
+                <a:spcPts val="600"/>
+              </a:spcAft>
+            </a:pPr>
+            <a:r>
+              <a:rPr sz="2200" b="1" i="0">
+                <a:solidFill>
+                  <a:srgbClr val="E65100"/>
+                </a:solidFill>
+                <a:latin typeface="Open Sans"/>
+              </a:rPr>
+              <a:t>Retenção</a:t>
+            </a:r>
+          </a:p>
+        </p:txBody>
+      </p:sp>
+      <p:sp>
+        <p:nvSpPr>
+          <p:cNvPr id="16" name="TextBox 15"/>
+          <p:cNvSpPr txBox="1"/>
+          <p:nvPr/>
+        </p:nvSpPr>
+        <p:spPr>
+          <a:xfrm>
+            <a:off x="6675120" y="4983480"/>
+            <a:ext cx="4754880" cy="1371600"/>
+          </a:xfrm>
+          <a:prstGeom prst="rect">
+            <a:avLst/>
+          </a:prstGeom>
+          <a:noFill/>
+        </p:spPr>
+        <p:txBody>
+          <a:bodyPr wrap="square" anchor="t" lIns="0" rIns="0" tIns="0" bIns="0">
+            <a:spAutoFit/>
+          </a:bodyPr>
+          <a:lstStyle/>
+          <a:p>
+            <a:pPr algn="l">
+              <a:lnSpc>
+                <a:spcPct val="110000"/>
+              </a:lnSpc>
+              <a:spcBef>
+                <a:spcPts val="0"/>
+              </a:spcBef>
+              <a:spcAft>
+                <a:spcPts val="600"/>
+              </a:spcAft>
+            </a:pPr>
+            <a:r>
+              <a:rPr sz="1500" b="0" i="0">
+                <a:solidFill>
+                  <a:srgbClr val="212121"/>
+                </a:solidFill>
+                <a:latin typeface="Open Sans"/>
+              </a:rPr>
+              <a:t>apagar/anonimizar após o prazo legal</a:t>
+            </a:r>
+          </a:p>
+        </p:txBody>
+      </p:sp>
+      <p:sp>
+        <p:nvSpPr>
+          <p:cNvPr id="17" name="TextBox 16"/>
           <p:cNvSpPr txBox="1"/>
           <p:nvPr/>
         </p:nvSpPr>
@@ -8464,13 +10477,13 @@
         <p:spPr>
           <a:xfrm>
             <a:off x="0" y="0"/>
-            <a:ext cx="12191695" cy="6858000"/>
+            <a:ext cx="12191695" cy="1234440"/>
           </a:xfrm>
           <a:prstGeom prst="rect">
             <a:avLst/>
           </a:prstGeom>
           <a:solidFill>
-            <a:srgbClr val="1F5232"/>
+            <a:srgbClr val="2D7A3D"/>
           </a:solidFill>
           <a:ln>
             <a:noFill/>
@@ -8507,8 +10520,8 @@
         </p:nvSpPr>
         <p:spPr>
           <a:xfrm>
-            <a:off x="457200" y="2194560"/>
-            <a:ext cx="11247120" cy="548640"/>
+            <a:off x="457200" y="164592"/>
+            <a:ext cx="11247120" cy="640080"/>
           </a:xfrm>
           <a:prstGeom prst="rect">
             <a:avLst/>
@@ -8521,7 +10534,7 @@
           </a:bodyPr>
           <a:lstStyle/>
           <a:p>
-            <a:pPr algn="ctr">
+            <a:pPr algn="l">
               <a:lnSpc>
                 <a:spcPct val="100000"/>
               </a:lnSpc>
@@ -8533,13 +10546,13 @@
               </a:spcAft>
             </a:pPr>
             <a:r>
-              <a:rPr sz="2000" b="1" i="0">
-                <a:solidFill>
-                  <a:srgbClr val="7CB342"/>
+              <a:rPr sz="3200" b="1" i="0">
+                <a:solidFill>
+                  <a:srgbClr val="FFFFFF"/>
                 </a:solidFill>
                 <a:latin typeface="Open Sans"/>
               </a:rPr>
-              <a:t>PARTE 3</a:t>
+              <a:t>RIPD / DPIA (LGPD art. 38)</a:t>
             </a:r>
           </a:p>
         </p:txBody>
@@ -8552,8 +10565,8 @@
         </p:nvSpPr>
         <p:spPr>
           <a:xfrm>
-            <a:off x="457200" y="2834640"/>
-            <a:ext cx="11247120" cy="1280160"/>
+            <a:off x="457200" y="777240"/>
+            <a:ext cx="11247120" cy="365760"/>
           </a:xfrm>
           <a:prstGeom prst="rect">
             <a:avLst/>
@@ -8566,7 +10579,7 @@
           </a:bodyPr>
           <a:lstStyle/>
           <a:p>
-            <a:pPr algn="ctr">
+            <a:pPr algn="l">
               <a:lnSpc>
                 <a:spcPct val="100000"/>
               </a:lnSpc>
@@ -8578,13 +10591,13 @@
               </a:spcAft>
             </a:pPr>
             <a:r>
-              <a:rPr sz="6000" b="1" i="0">
-                <a:solidFill>
-                  <a:srgbClr val="FFFFFF"/>
+              <a:rPr sz="1600" b="0" i="1">
+                <a:solidFill>
+                  <a:srgbClr val="E0E8DB"/>
                 </a:solidFill>
                 <a:latin typeface="Open Sans"/>
               </a:rPr>
-              <a:t>No VidaPlus</a:t>
+              <a:t>O LINDDUN alimenta o relatório</a:t>
             </a:r>
           </a:p>
         </p:txBody>
@@ -8597,8 +10610,8 @@
         </p:nvSpPr>
         <p:spPr>
           <a:xfrm>
-            <a:off x="457200" y="4297680"/>
-            <a:ext cx="11247120" cy="457200"/>
+            <a:off x="548640" y="1737360"/>
+            <a:ext cx="1371600" cy="1371600"/>
           </a:xfrm>
           <a:prstGeom prst="rect">
             <a:avLst/>
@@ -8611,7 +10624,7 @@
           </a:bodyPr>
           <a:lstStyle/>
           <a:p>
-            <a:pPr algn="ctr">
+            <a:pPr algn="l">
               <a:lnSpc>
                 <a:spcPct val="100000"/>
               </a:lnSpc>
@@ -8623,26 +10636,116 @@
               </a:spcAft>
             </a:pPr>
             <a:r>
-              <a:rPr sz="2200" b="0" i="1">
-                <a:solidFill>
-                  <a:srgbClr val="CCD7C0"/>
+              <a:rPr sz="13000" b="1" i="0">
+                <a:solidFill>
+                  <a:srgbClr val="7CB342"/>
                 </a:solidFill>
                 <a:latin typeface="Open Sans"/>
               </a:rPr>
-              <a:t>A etapa desta semana (Fase 2b)</a:t>
-            </a:r>
-          </a:p>
-        </p:txBody>
-      </p:sp>
-      <p:sp>
-        <p:nvSpPr>
-          <p:cNvPr id="6" name="Rectangle 5"/>
+              <a:t>“</a:t>
+            </a:r>
+          </a:p>
+        </p:txBody>
+      </p:sp>
+      <p:sp>
+        <p:nvSpPr>
+          <p:cNvPr id="6" name="TextBox 5"/>
+          <p:cNvSpPr txBox="1"/>
+          <p:nvPr/>
+        </p:nvSpPr>
+        <p:spPr>
+          <a:xfrm>
+            <a:off x="1828800" y="2194560"/>
+            <a:ext cx="9601200" cy="2286000"/>
+          </a:xfrm>
+          <a:prstGeom prst="rect">
+            <a:avLst/>
+          </a:prstGeom>
+          <a:noFill/>
+        </p:spPr>
+        <p:txBody>
+          <a:bodyPr wrap="square" anchor="t" lIns="0" rIns="0" tIns="0" bIns="0">
+            <a:spAutoFit/>
+          </a:bodyPr>
+          <a:lstStyle/>
+          <a:p>
+            <a:pPr algn="l">
+              <a:lnSpc>
+                <a:spcPct val="115000"/>
+              </a:lnSpc>
+              <a:spcBef>
+                <a:spcPts val="0"/>
+              </a:spcBef>
+              <a:spcAft>
+                <a:spcPts val="600"/>
+              </a:spcAft>
+            </a:pPr>
+            <a:r>
+              <a:rPr sz="3000" b="0" i="1">
+                <a:solidFill>
+                  <a:srgbClr val="2D7A3D"/>
+                </a:solidFill>
+                <a:latin typeface="Open Sans"/>
+              </a:rPr>
+              <a:t>Cada ameaça de privacidade do LINDDUN, com seu risco e a medida mitigadora, compõe o Relatório de Impacto à Proteção de Dados — exigido em tratamentos de alto risco.</a:t>
+            </a:r>
+          </a:p>
+        </p:txBody>
+      </p:sp>
+      <p:sp>
+        <p:nvSpPr>
+          <p:cNvPr id="7" name="TextBox 6"/>
+          <p:cNvSpPr txBox="1"/>
+          <p:nvPr/>
+        </p:nvSpPr>
+        <p:spPr>
+          <a:xfrm>
+            <a:off x="1828800" y="4937760"/>
+            <a:ext cx="9601200" cy="548640"/>
+          </a:xfrm>
+          <a:prstGeom prst="rect">
+            <a:avLst/>
+          </a:prstGeom>
+          <a:noFill/>
+        </p:spPr>
+        <p:txBody>
+          <a:bodyPr wrap="square" anchor="t" lIns="0" rIns="0" tIns="0" bIns="0">
+            <a:spAutoFit/>
+          </a:bodyPr>
+          <a:lstStyle/>
+          <a:p>
+            <a:pPr algn="l">
+              <a:lnSpc>
+                <a:spcPct val="100000"/>
+              </a:lnSpc>
+              <a:spcBef>
+                <a:spcPts val="0"/>
+              </a:spcBef>
+              <a:spcAft>
+                <a:spcPts val="600"/>
+              </a:spcAft>
+            </a:pPr>
+            <a:r>
+              <a:rPr sz="1800" b="1" i="0">
+                <a:solidFill>
+                  <a:srgbClr val="616161"/>
+                </a:solidFill>
+                <a:latin typeface="Open Sans"/>
+              </a:rPr>
+              <a:t>LGPD art. 38</a:t>
+            </a:r>
+          </a:p>
+        </p:txBody>
+      </p:sp>
+      <p:sp>
+        <p:nvSpPr>
+          <p:cNvPr id="8" name="Rectangle 7"/>
           <p:cNvSpPr/>
           <p:nvPr/>
         </p:nvSpPr>
         <p:spPr>
           <a:xfrm>
-            <a:off x="5184648" y="4983480"/>
+            <a:off x="1828800" y="5532120"/>
             <a:ext cx="1828800" cy="25400"/>
           </a:xfrm>
           <a:prstGeom prst="rect">
@@ -8675,6 +10778,51 @@
           <a:lstStyle/>
           <a:p>
             <a:pPr algn="ctr"/>
+          </a:p>
+        </p:txBody>
+      </p:sp>
+      <p:sp>
+        <p:nvSpPr>
+          <p:cNvPr id="9" name="TextBox 8"/>
+          <p:cNvSpPr txBox="1"/>
+          <p:nvPr/>
+        </p:nvSpPr>
+        <p:spPr>
+          <a:xfrm>
+            <a:off x="10972800" y="6446520"/>
+            <a:ext cx="914400" cy="320040"/>
+          </a:xfrm>
+          <a:prstGeom prst="rect">
+            <a:avLst/>
+          </a:prstGeom>
+          <a:noFill/>
+        </p:spPr>
+        <p:txBody>
+          <a:bodyPr wrap="square" anchor="t" lIns="0" rIns="0" tIns="0" bIns="0">
+            <a:spAutoFit/>
+          </a:bodyPr>
+          <a:lstStyle/>
+          <a:p>
+            <a:pPr algn="r">
+              <a:lnSpc>
+                <a:spcPct val="100000"/>
+              </a:lnSpc>
+              <a:spcBef>
+                <a:spcPts val="0"/>
+              </a:spcBef>
+              <a:spcAft>
+                <a:spcPts val="600"/>
+              </a:spcAft>
+            </a:pPr>
+            <a:r>
+              <a:rPr sz="1100" b="0" i="0">
+                <a:solidFill>
+                  <a:srgbClr val="616161"/>
+                </a:solidFill>
+                <a:latin typeface="Open Sans"/>
+              </a:rPr>
+              <a:t>8</a:t>
+            </a:r>
           </a:p>
         </p:txBody>
       </p:sp>
@@ -8705,13 +10853,13 @@
         <p:spPr>
           <a:xfrm>
             <a:off x="0" y="0"/>
-            <a:ext cx="12191695" cy="1234440"/>
+            <a:ext cx="12191695" cy="6858000"/>
           </a:xfrm>
           <a:prstGeom prst="rect">
             <a:avLst/>
           </a:prstGeom>
           <a:solidFill>
-            <a:srgbClr val="2D7A3D"/>
+            <a:srgbClr val="1F5232"/>
           </a:solidFill>
           <a:ln>
             <a:noFill/>
@@ -8748,8 +10896,8 @@
         </p:nvSpPr>
         <p:spPr>
           <a:xfrm>
-            <a:off x="457200" y="164592"/>
-            <a:ext cx="11247120" cy="640080"/>
+            <a:off x="457200" y="2194560"/>
+            <a:ext cx="11247120" cy="548640"/>
           </a:xfrm>
           <a:prstGeom prst="rect">
             <a:avLst/>
@@ -8762,7 +10910,7 @@
           </a:bodyPr>
           <a:lstStyle/>
           <a:p>
-            <a:pPr algn="l">
+            <a:pPr algn="ctr">
               <a:lnSpc>
                 <a:spcPct val="100000"/>
               </a:lnSpc>
@@ -8774,13 +10922,13 @@
               </a:spcAft>
             </a:pPr>
             <a:r>
-              <a:rPr sz="3200" b="1" i="0">
-                <a:solidFill>
-                  <a:srgbClr val="FFFFFF"/>
+              <a:rPr sz="2000" b="1" i="0">
+                <a:solidFill>
+                  <a:srgbClr val="7CB342"/>
                 </a:solidFill>
                 <a:latin typeface="Open Sans"/>
               </a:rPr>
-              <a:t>Entregável da Fase 2b</a:t>
+              <a:t>PARTE 3</a:t>
             </a:r>
           </a:p>
         </p:txBody>
@@ -8793,8 +10941,8 @@
         </p:nvSpPr>
         <p:spPr>
           <a:xfrm>
-            <a:off x="457200" y="777240"/>
-            <a:ext cx="11247120" cy="365760"/>
+            <a:off x="457200" y="2834640"/>
+            <a:ext cx="11247120" cy="1280160"/>
           </a:xfrm>
           <a:prstGeom prst="rect">
             <a:avLst/>
@@ -8807,7 +10955,7 @@
           </a:bodyPr>
           <a:lstStyle/>
           <a:p>
-            <a:pPr algn="l">
+            <a:pPr algn="ctr">
               <a:lnSpc>
                 <a:spcPct val="100000"/>
               </a:lnSpc>
@@ -8819,281 +10967,27 @@
               </a:spcAft>
             </a:pPr>
             <a:r>
-              <a:rPr sz="1600" b="0" i="1">
-                <a:solidFill>
-                  <a:srgbClr val="E0E8DB"/>
+              <a:rPr sz="6000" b="1" i="0">
+                <a:solidFill>
+                  <a:srgbClr val="FFFFFF"/>
                 </a:solidFill>
                 <a:latin typeface="Open Sans"/>
               </a:rPr>
-              <a:t>Modelo de ameaças de privacidade</a:t>
-            </a:r>
-          </a:p>
-        </p:txBody>
-      </p:sp>
-      <p:sp>
-        <p:nvSpPr>
-          <p:cNvPr id="5" name="Rounded Rectangle 4"/>
-          <p:cNvSpPr/>
-          <p:nvPr/>
-        </p:nvSpPr>
-        <p:spPr>
-          <a:xfrm>
-            <a:off x="411480" y="1463040"/>
-            <a:ext cx="11384280" cy="5029200"/>
-          </a:xfrm>
-          <a:prstGeom prst="roundRect">
-            <a:avLst/>
-          </a:prstGeom>
-          <a:solidFill>
-            <a:srgbClr val="F5F5F5"/>
-          </a:solidFill>
-          <a:ln w="15875">
-            <a:solidFill>
-              <a:srgbClr val="7CB342"/>
-            </a:solidFill>
-          </a:ln>
-          <a:effectLst/>
-        </p:spPr>
-        <p:style>
-          <a:lnRef idx="1">
-            <a:schemeClr val="accent1"/>
-          </a:lnRef>
-          <a:fillRef idx="3">
-            <a:schemeClr val="accent1"/>
-          </a:fillRef>
-          <a:effectRef idx="2">
-            <a:schemeClr val="accent1"/>
-          </a:effectRef>
-          <a:fontRef idx="minor">
-            <a:schemeClr val="lt1"/>
-          </a:fontRef>
-        </p:style>
-        <p:txBody>
-          <a:bodyPr rtlCol="0" anchor="ctr"/>
-          <a:lstStyle/>
-          <a:p>
-            <a:pPr algn="ctr"/>
-          </a:p>
-        </p:txBody>
-      </p:sp>
-      <p:sp>
-        <p:nvSpPr>
-          <p:cNvPr id="6" name="TextBox 5"/>
+              <a:t>No VidaPlus</a:t>
+            </a:r>
+          </a:p>
+        </p:txBody>
+      </p:sp>
+      <p:sp>
+        <p:nvSpPr>
+          <p:cNvPr id="5" name="TextBox 4"/>
           <p:cNvSpPr txBox="1"/>
           <p:nvPr/>
         </p:nvSpPr>
         <p:spPr>
           <a:xfrm>
-            <a:off x="868680" y="1783080"/>
-            <a:ext cx="10515600" cy="4572000"/>
-          </a:xfrm>
-          <a:prstGeom prst="rect">
-            <a:avLst/>
-          </a:prstGeom>
-          <a:noFill/>
-        </p:spPr>
-        <p:txBody>
-          <a:bodyPr wrap="square">
-            <a:spAutoFit/>
-          </a:bodyPr>
-          <a:lstStyle/>
-          <a:p>
-            <a:pPr algn="l">
-              <a:lnSpc>
-                <a:spcPct val="110000"/>
-              </a:lnSpc>
-              <a:spcAft>
-                <a:spcPts val="1400"/>
-              </a:spcAft>
-            </a:pPr>
-            <a:r>
-              <a:rPr sz="2000" b="1">
-                <a:solidFill>
-                  <a:srgbClr val="7CB342"/>
-                </a:solidFill>
-                <a:latin typeface="Open Sans"/>
-              </a:rPr>
-              <a:t>▸ </a:t>
-            </a:r>
-            <a:r>
-              <a:rPr sz="1800" b="1">
-                <a:solidFill>
-                  <a:srgbClr val="2D7A3D"/>
-                </a:solidFill>
-                <a:latin typeface="Open Sans"/>
-              </a:rPr>
-              <a:t>LINDDUN-per-element: </a:t>
-            </a:r>
-            <a:r>
-              <a:rPr sz="1800">
-                <a:solidFill>
-                  <a:srgbClr val="212121"/>
-                </a:solidFill>
-                <a:latin typeface="Open Sans"/>
-              </a:rPr>
-              <a:t>rode sobre o mesmo DFD do STRIDE.</a:t>
-            </a:r>
-          </a:p>
-          <a:p>
-            <a:pPr algn="l">
-              <a:lnSpc>
-                <a:spcPct val="110000"/>
-              </a:lnSpc>
-              <a:spcAft>
-                <a:spcPts val="1400"/>
-              </a:spcAft>
-            </a:pPr>
-            <a:r>
-              <a:rPr sz="2000" b="1">
-                <a:solidFill>
-                  <a:srgbClr val="7CB342"/>
-                </a:solidFill>
-                <a:latin typeface="Open Sans"/>
-              </a:rPr>
-              <a:t>▸ </a:t>
-            </a:r>
-            <a:r>
-              <a:rPr sz="1800" b="1">
-                <a:solidFill>
-                  <a:srgbClr val="2D7A3D"/>
-                </a:solidFill>
-                <a:latin typeface="Open Sans"/>
-              </a:rPr>
-              <a:t>Controle/PET: </a:t>
-            </a:r>
-            <a:r>
-              <a:rPr sz="1800">
-                <a:solidFill>
-                  <a:srgbClr val="212121"/>
-                </a:solidFill>
-                <a:latin typeface="Open Sans"/>
-              </a:rPr>
-              <a:t>para cada ameaça, proponha minimização/pseudonimização.</a:t>
-            </a:r>
-          </a:p>
-          <a:p>
-            <a:pPr algn="l">
-              <a:lnSpc>
-                <a:spcPct val="110000"/>
-              </a:lnSpc>
-              <a:spcAft>
-                <a:spcPts val="1400"/>
-              </a:spcAft>
-            </a:pPr>
-            <a:r>
-              <a:rPr sz="2000" b="1">
-                <a:solidFill>
-                  <a:srgbClr val="7CB342"/>
-                </a:solidFill>
-                <a:latin typeface="Open Sans"/>
-              </a:rPr>
-              <a:t>▸ </a:t>
-            </a:r>
-            <a:r>
-              <a:rPr sz="1800" b="1">
-                <a:solidFill>
-                  <a:srgbClr val="2D7A3D"/>
-                </a:solidFill>
-                <a:latin typeface="Open Sans"/>
-              </a:rPr>
-              <a:t>Minimização: </a:t>
-            </a:r>
-            <a:r>
-              <a:rPr sz="1800">
-                <a:solidFill>
-                  <a:srgbClr val="212121"/>
-                </a:solidFill>
-                <a:latin typeface="Open Sans"/>
-              </a:rPr>
-              <a:t>identifique campos sem finalidade (religião, renda).</a:t>
-            </a:r>
-          </a:p>
-          <a:p>
-            <a:pPr algn="l">
-              <a:lnSpc>
-                <a:spcPct val="110000"/>
-              </a:lnSpc>
-              <a:spcAft>
-                <a:spcPts val="1400"/>
-              </a:spcAft>
-            </a:pPr>
-            <a:r>
-              <a:rPr sz="2000" b="1">
-                <a:solidFill>
-                  <a:srgbClr val="7CB342"/>
-                </a:solidFill>
-                <a:latin typeface="Open Sans"/>
-              </a:rPr>
-              <a:t>▸ </a:t>
-            </a:r>
-            <a:r>
-              <a:rPr sz="1800" b="1">
-                <a:solidFill>
-                  <a:srgbClr val="2D7A3D"/>
-                </a:solidFill>
-                <a:latin typeface="Open Sans"/>
-              </a:rPr>
-              <a:t>RIPD: </a:t>
-            </a:r>
-            <a:r>
-              <a:rPr sz="1800">
-                <a:solidFill>
-                  <a:srgbClr val="212121"/>
-                </a:solidFill>
-                <a:latin typeface="Open Sans"/>
-              </a:rPr>
-              <a:t>esboce o relatório a partir da tabela LINDDUN.</a:t>
-            </a:r>
-          </a:p>
-          <a:p>
-            <a:pPr algn="l">
-              <a:lnSpc>
-                <a:spcPct val="110000"/>
-              </a:lnSpc>
-              <a:spcAft>
-                <a:spcPts val="1400"/>
-              </a:spcAft>
-            </a:pPr>
-            <a:r>
-              <a:rPr sz="2000" b="1">
-                <a:solidFill>
-                  <a:srgbClr val="7CB342"/>
-                </a:solidFill>
-                <a:latin typeface="Open Sans"/>
-              </a:rPr>
-              <a:t>▸ </a:t>
-            </a:r>
-            <a:r>
-              <a:rPr sz="1800" b="1">
-                <a:solidFill>
-                  <a:srgbClr val="2D7A3D"/>
-                </a:solidFill>
-                <a:latin typeface="Open Sans"/>
-              </a:rPr>
-              <a:t>Regra: </a:t>
-            </a:r>
-            <a:r>
-              <a:rPr sz="1800">
-                <a:solidFill>
-                  <a:srgbClr val="212121"/>
-                </a:solidFill>
-                <a:latin typeface="Open Sans"/>
-              </a:rPr>
-              <a:t>ameaça de privacidade priorizada = requisito com teste.</a:t>
-            </a:r>
-          </a:p>
-        </p:txBody>
-      </p:sp>
-      <p:sp>
-        <p:nvSpPr>
-          <p:cNvPr id="7" name="TextBox 6"/>
-          <p:cNvSpPr txBox="1"/>
-          <p:nvPr/>
-        </p:nvSpPr>
-        <p:spPr>
-          <a:xfrm>
-            <a:off x="10972800" y="6446520"/>
-            <a:ext cx="914400" cy="320040"/>
+            <a:off x="457200" y="4297680"/>
+            <a:ext cx="11247120" cy="457200"/>
           </a:xfrm>
           <a:prstGeom prst="rect">
             <a:avLst/>
@@ -9106,7 +11000,7 @@
           </a:bodyPr>
           <a:lstStyle/>
           <a:p>
-            <a:pPr algn="r">
+            <a:pPr algn="ctr">
               <a:lnSpc>
                 <a:spcPct val="100000"/>
               </a:lnSpc>
@@ -9118,14 +11012,58 @@
               </a:spcAft>
             </a:pPr>
             <a:r>
-              <a:rPr sz="1100" b="0" i="0">
-                <a:solidFill>
-                  <a:srgbClr val="616161"/>
+              <a:rPr sz="2200" b="0" i="1">
+                <a:solidFill>
+                  <a:srgbClr val="CCD7C0"/>
                 </a:solidFill>
                 <a:latin typeface="Open Sans"/>
               </a:rPr>
-              <a:t>9</a:t>
-            </a:r>
+              <a:t>A etapa desta semana (Fase 2b)</a:t>
+            </a:r>
+          </a:p>
+        </p:txBody>
+      </p:sp>
+      <p:sp>
+        <p:nvSpPr>
+          <p:cNvPr id="6" name="Rectangle 5"/>
+          <p:cNvSpPr/>
+          <p:nvPr/>
+        </p:nvSpPr>
+        <p:spPr>
+          <a:xfrm>
+            <a:off x="5184648" y="4983480"/>
+            <a:ext cx="1828800" cy="25400"/>
+          </a:xfrm>
+          <a:prstGeom prst="rect">
+            <a:avLst/>
+          </a:prstGeom>
+          <a:solidFill>
+            <a:srgbClr val="7CB342"/>
+          </a:solidFill>
+          <a:ln>
+            <a:noFill/>
+          </a:ln>
+          <a:effectLst/>
+        </p:spPr>
+        <p:style>
+          <a:lnRef idx="1">
+            <a:schemeClr val="accent1"/>
+          </a:lnRef>
+          <a:fillRef idx="3">
+            <a:schemeClr val="accent1"/>
+          </a:fillRef>
+          <a:effectRef idx="2">
+            <a:schemeClr val="accent1"/>
+          </a:effectRef>
+          <a:fontRef idx="minor">
+            <a:schemeClr val="lt1"/>
+          </a:fontRef>
+        </p:style>
+        <p:txBody>
+          <a:bodyPr rtlCol="0" anchor="ctr"/>
+          <a:lstStyle/>
+          <a:p>
+            <a:pPr algn="ctr"/>
           </a:p>
         </p:txBody>
       </p:sp>
@@ -9455,4 +11393,324 @@
   </a:objectDefaults>
   <a:extraClrSchemeLst/>
 </a:theme>
+</file>
+
+<file path=ppt/theme/theme2.xml><?xml version="1.0" encoding="utf-8"?>
+<a:theme xmlns:a="http://schemas.openxmlformats.org/drawingml/2006/main" name="Office Theme">
+  <a:themeElements>
+    <a:clrScheme name="Office">
+      <a:dk1>
+        <a:sysClr val="windowText" lastClr="000000"/>
+      </a:dk1>
+      <a:lt1>
+        <a:sysClr val="window" lastClr="FFFFFF"/>
+      </a:lt1>
+      <a:dk2>
+        <a:srgbClr val="1F497D"/>
+      </a:dk2>
+      <a:lt2>
+        <a:srgbClr val="EEECE1"/>
+      </a:lt2>
+      <a:accent1>
+        <a:srgbClr val="4F81BD"/>
+      </a:accent1>
+      <a:accent2>
+        <a:srgbClr val="C0504D"/>
+      </a:accent2>
+      <a:accent3>
+        <a:srgbClr val="9BBB59"/>
+      </a:accent3>
+      <a:accent4>
+        <a:srgbClr val="8064A2"/>
+      </a:accent4>
+      <a:accent5>
+        <a:srgbClr val="4BACC6"/>
+      </a:accent5>
+      <a:accent6>
+        <a:srgbClr val="F79646"/>
+      </a:accent6>
+      <a:hlink>
+        <a:srgbClr val="0000FF"/>
+      </a:hlink>
+      <a:folHlink>
+        <a:srgbClr val="800080"/>
+      </a:folHlink>
+    </a:clrScheme>
+    <a:fontScheme name="Office">
+      <a:majorFont>
+        <a:latin typeface="Calibri"/>
+        <a:ea typeface=""/>
+        <a:cs typeface=""/>
+        <a:font script="Jpan" typeface="ＭＳ Ｐゴシック"/>
+        <a:font script="Hang" typeface="맑은 고딕"/>
+        <a:font script="Hans" typeface="宋体"/>
+        <a:font script="Hant" typeface="新細明體"/>
+        <a:font script="Arab" typeface="Times New Roman"/>
+        <a:font script="Hebr" typeface="Times New Roman"/>
+        <a:font script="Thai" typeface="Angsana New"/>
+        <a:font script="Ethi" typeface="Nyala"/>
+        <a:font script="Beng" typeface="Vrinda"/>
+        <a:font script="Gujr" typeface="Shruti"/>
+        <a:font script="Khmr" typeface="MoolBoran"/>
+        <a:font script="Knda" typeface="Tunga"/>
+        <a:font script="Guru" typeface="Raavi"/>
+        <a:font script="Cans" typeface="Euphemia"/>
+        <a:font script="Cher" typeface="Plantagenet Cherokee"/>
+        <a:font script="Yiii" typeface="Microsoft Yi Baiti"/>
+        <a:font script="Tibt" typeface="Microsoft Himalaya"/>
+        <a:font script="Thaa" typeface="MV Boli"/>
+        <a:font script="Deva" typeface="Mangal"/>
+        <a:font script="Telu" typeface="Gautami"/>
+        <a:font script="Taml" typeface="Latha"/>
+        <a:font script="Syrc" typeface="Estrangelo Edessa"/>
+        <a:font script="Orya" typeface="Kalinga"/>
+        <a:font script="Mlym" typeface="Kartika"/>
+        <a:font script="Laoo" typeface="DokChampa"/>
+        <a:font script="Sinh" typeface="Iskoola Pota"/>
+        <a:font script="Mong" typeface="Mongolian Baiti"/>
+        <a:font script="Viet" typeface="Times New Roman"/>
+        <a:font script="Uigh" typeface="Microsoft Uighur"/>
+        <a:font script="Geor" typeface="Sylfaen"/>
+      </a:majorFont>
+      <a:minorFont>
+        <a:latin typeface="Calibri"/>
+        <a:ea typeface=""/>
+        <a:cs typeface=""/>
+        <a:font script="Jpan" typeface="ＭＳ Ｐゴシック"/>
+        <a:font script="Hang" typeface="맑은 고딕"/>
+        <a:font script="Hans" typeface="宋体"/>
+        <a:font script="Hant" typeface="新細明體"/>
+        <a:font script="Arab" typeface="Arial"/>
+        <a:font script="Hebr" typeface="Arial"/>
+        <a:font script="Thai" typeface="Cordia New"/>
+        <a:font script="Ethi" typeface="Nyala"/>
+        <a:font script="Beng" typeface="Vrinda"/>
+        <a:font script="Gujr" typeface="Shruti"/>
+        <a:font script="Khmr" typeface="DaunPenh"/>
+        <a:font script="Knda" typeface="Tunga"/>
+        <a:font script="Guru" typeface="Raavi"/>
+        <a:font script="Cans" typeface="Euphemia"/>
+        <a:font script="Cher" typeface="Plantagenet Cherokee"/>
+        <a:font script="Yiii" typeface="Microsoft Yi Baiti"/>
+        <a:font script="Tibt" typeface="Microsoft Himalaya"/>
+        <a:font script="Thaa" typeface="MV Boli"/>
+        <a:font script="Deva" typeface="Mangal"/>
+        <a:font script="Telu" typeface="Gautami"/>
+        <a:font script="Taml" typeface="Latha"/>
+        <a:font script="Syrc" typeface="Estrangelo Edessa"/>
+        <a:font script="Orya" typeface="Kalinga"/>
+        <a:font script="Mlym" typeface="Kartika"/>
+        <a:font script="Laoo" typeface="DokChampa"/>
+        <a:font script="Sinh" typeface="Iskoola Pota"/>
+        <a:font script="Mong" typeface="Mongolian Baiti"/>
+        <a:font script="Viet" typeface="Arial"/>
+        <a:font script="Uigh" typeface="Microsoft Uighur"/>
+        <a:font script="Geor" typeface="Sylfaen"/>
+      </a:minorFont>
+    </a:fontScheme>
+    <a:fmtScheme name="Office">
+      <a:fillStyleLst>
+        <a:solidFill>
+          <a:schemeClr val="phClr"/>
+        </a:solidFill>
+        <a:gradFill rotWithShape="1">
+          <a:gsLst>
+            <a:gs pos="0">
+              <a:schemeClr val="phClr">
+                <a:tint val="50000"/>
+                <a:satMod val="300000"/>
+              </a:schemeClr>
+            </a:gs>
+            <a:gs pos="35000">
+              <a:schemeClr val="phClr">
+                <a:tint val="37000"/>
+                <a:satMod val="300000"/>
+              </a:schemeClr>
+            </a:gs>
+            <a:gs pos="100000">
+              <a:schemeClr val="phClr">
+                <a:tint val="15000"/>
+                <a:satMod val="350000"/>
+              </a:schemeClr>
+            </a:gs>
+          </a:gsLst>
+          <a:lin ang="16200000" scaled="1"/>
+        </a:gradFill>
+        <a:gradFill rotWithShape="1">
+          <a:gsLst>
+            <a:gs pos="0">
+              <a:schemeClr val="phClr">
+                <a:tint val="100000"/>
+                <a:shade val="100000"/>
+                <a:satMod val="130000"/>
+              </a:schemeClr>
+            </a:gs>
+            <a:gs pos="100000">
+              <a:schemeClr val="phClr">
+                <a:tint val="50000"/>
+                <a:shade val="100000"/>
+                <a:satMod val="350000"/>
+              </a:schemeClr>
+            </a:gs>
+          </a:gsLst>
+          <a:lin ang="16200000" scaled="0"/>
+        </a:gradFill>
+      </a:fillStyleLst>
+      <a:lnStyleLst>
+        <a:ln w="9525" cap="flat" cmpd="sng" algn="ctr">
+          <a:solidFill>
+            <a:schemeClr val="phClr">
+              <a:shade val="95000"/>
+              <a:satMod val="105000"/>
+            </a:schemeClr>
+          </a:solidFill>
+          <a:prstDash val="solid"/>
+        </a:ln>
+        <a:ln w="25400" cap="flat" cmpd="sng" algn="ctr">
+          <a:solidFill>
+            <a:schemeClr val="phClr"/>
+          </a:solidFill>
+          <a:prstDash val="solid"/>
+        </a:ln>
+        <a:ln w="38100" cap="flat" cmpd="sng" algn="ctr">
+          <a:solidFill>
+            <a:schemeClr val="phClr"/>
+          </a:solidFill>
+          <a:prstDash val="solid"/>
+        </a:ln>
+      </a:lnStyleLst>
+      <a:effectStyleLst>
+        <a:effectStyle>
+          <a:effectLst>
+            <a:outerShdw blurRad="40000" dist="20000" dir="5400000" rotWithShape="0">
+              <a:srgbClr val="000000">
+                <a:alpha val="38000"/>
+              </a:srgbClr>
+            </a:outerShdw>
+          </a:effectLst>
+        </a:effectStyle>
+        <a:effectStyle>
+          <a:effectLst>
+            <a:outerShdw blurRad="40000" dist="23000" dir="5400000" rotWithShape="0">
+              <a:srgbClr val="000000">
+                <a:alpha val="35000"/>
+              </a:srgbClr>
+            </a:outerShdw>
+          </a:effectLst>
+        </a:effectStyle>
+        <a:effectStyle>
+          <a:effectLst>
+            <a:outerShdw blurRad="40000" dist="23000" dir="5400000" rotWithShape="0">
+              <a:srgbClr val="000000">
+                <a:alpha val="35000"/>
+              </a:srgbClr>
+            </a:outerShdw>
+          </a:effectLst>
+          <a:scene3d>
+            <a:camera prst="orthographicFront">
+              <a:rot lat="0" lon="0" rev="0"/>
+            </a:camera>
+            <a:lightRig rig="threePt" dir="t">
+              <a:rot lat="0" lon="0" rev="1200000"/>
+            </a:lightRig>
+          </a:scene3d>
+          <a:sp3d>
+            <a:bevelT w="63500" h="25400"/>
+          </a:sp3d>
+        </a:effectStyle>
+      </a:effectStyleLst>
+      <a:bgFillStyleLst>
+        <a:solidFill>
+          <a:schemeClr val="phClr"/>
+        </a:solidFill>
+        <a:gradFill rotWithShape="1">
+          <a:gsLst>
+            <a:gs pos="0">
+              <a:schemeClr val="phClr">
+                <a:tint val="40000"/>
+                <a:satMod val="350000"/>
+              </a:schemeClr>
+            </a:gs>
+            <a:gs pos="40000">
+              <a:schemeClr val="phClr">
+                <a:tint val="45000"/>
+                <a:shade val="99000"/>
+                <a:satMod val="350000"/>
+              </a:schemeClr>
+            </a:gs>
+            <a:gs pos="100000">
+              <a:schemeClr val="phClr">
+                <a:shade val="20000"/>
+                <a:satMod val="255000"/>
+              </a:schemeClr>
+            </a:gs>
+          </a:gsLst>
+          <a:path path="circle">
+            <a:fillToRect l="50000" t="-80000" r="50000" b="180000"/>
+          </a:path>
+        </a:gradFill>
+        <a:gradFill rotWithShape="1">
+          <a:gsLst>
+            <a:gs pos="0">
+              <a:schemeClr val="phClr">
+                <a:tint val="80000"/>
+                <a:satMod val="300000"/>
+              </a:schemeClr>
+            </a:gs>
+            <a:gs pos="100000">
+              <a:schemeClr val="phClr">
+                <a:shade val="30000"/>
+                <a:satMod val="200000"/>
+              </a:schemeClr>
+            </a:gs>
+          </a:gsLst>
+          <a:path path="circle">
+            <a:fillToRect l="50000" t="50000" r="50000" b="50000"/>
+          </a:path>
+        </a:gradFill>
+      </a:bgFillStyleLst>
+    </a:fmtScheme>
+  </a:themeElements>
+  <a:objectDefaults>
+    <a:spDef>
+      <a:spPr/>
+      <a:bodyPr/>
+      <a:lstStyle/>
+      <a:style>
+        <a:lnRef idx="1">
+          <a:schemeClr val="accent1"/>
+        </a:lnRef>
+        <a:fillRef idx="3">
+          <a:schemeClr val="accent1"/>
+        </a:fillRef>
+        <a:effectRef idx="2">
+          <a:schemeClr val="accent1"/>
+        </a:effectRef>
+        <a:fontRef idx="minor">
+          <a:schemeClr val="lt1"/>
+        </a:fontRef>
+      </a:style>
+    </a:spDef>
+    <a:lnDef>
+      <a:spPr/>
+      <a:bodyPr/>
+      <a:lstStyle/>
+      <a:style>
+        <a:lnRef idx="2">
+          <a:schemeClr val="accent1"/>
+        </a:lnRef>
+        <a:fillRef idx="0">
+          <a:schemeClr val="accent1"/>
+        </a:fillRef>
+        <a:effectRef idx="1">
+          <a:schemeClr val="accent1"/>
+        </a:effectRef>
+        <a:fontRef idx="minor">
+          <a:schemeClr val="tx1"/>
+        </a:fontRef>
+      </a:style>
+    </a:lnDef>
+  </a:objectDefaults>
+  <a:extraClrSchemeLst/>
+</a:theme>
 </file>
--- a/aulas/aula-04-privacidade-linddun.pptx
+++ b/aulas/aula-04-privacidade-linddun.pptx
@@ -4422,7 +4422,7 @@
                 </a:solidFill>
                 <a:latin typeface="Open Sans"/>
               </a:rPr>
-              <a:t>Modelo de ameaças de privacidade</a:t>
+              <a:t>Threat model de privacidade — LINDDUN + RIPD (dossiê §4)</a:t>
             </a:r>
           </a:p>
         </p:txBody>
@@ -4519,7 +4519,7 @@
                 </a:solidFill>
                 <a:latin typeface="Open Sans"/>
               </a:rPr>
-              <a:t>LINDDUN-per-element: </a:t>
+              <a:t>Entregar: </a:t>
             </a:r>
             <a:r>
               <a:rPr sz="1800">
@@ -4528,7 +4528,7 @@
                 </a:solidFill>
                 <a:latin typeface="Open Sans"/>
               </a:rPr>
-              <a:t>rode sobre o mesmo DFD do STRIDE.</a:t>
+              <a:t>tabela LINDDUN-per-element sobre o mesmo DFD do STRIDE (§4.1).</a:t>
             </a:r>
           </a:p>
           <a:p>
@@ -4565,7 +4565,7 @@
                 </a:solidFill>
                 <a:latin typeface="Open Sans"/>
               </a:rPr>
-              <a:t>para cada ameaça, proponha minimização/pseudonimização/etc.</a:t>
+              <a:t>para cada ameaça, um controle (minimização/pseudonimização/…).</a:t>
             </a:r>
           </a:p>
           <a:p>
@@ -4602,7 +4602,7 @@
                 </a:solidFill>
                 <a:latin typeface="Open Sans"/>
               </a:rPr>
-              <a:t>identifique campos sem finalidade (religião, renda no cadastro).</a:t>
+              <a:t>aponte campos sem finalidade (ex.: religião, renda no cadastro).</a:t>
             </a:r>
           </a:p>
           <a:p>
@@ -4639,7 +4639,7 @@
                 </a:solidFill>
                 <a:latin typeface="Open Sans"/>
               </a:rPr>
-              <a:t>esboce o relatório a partir da tabela LINDDUN.</a:t>
+              <a:t>esboce o relatório a partir da tabela LINDDUN (§4.3).</a:t>
             </a:r>
           </a:p>
           <a:p>
@@ -4667,7 +4667,7 @@
                 </a:solidFill>
                 <a:latin typeface="Open Sans"/>
               </a:rPr>
-              <a:t>Regra: </a:t>
+              <a:t>Pronto quando: </a:t>
             </a:r>
             <a:r>
               <a:rPr sz="1800">
@@ -4676,7 +4676,7 @@
                 </a:solidFill>
                 <a:latin typeface="Open Sans"/>
               </a:rPr>
-              <a:t>ameaça de privacidade priorizada = requisito com teste.</a:t>
+              <a:t>toda ameaça de privacidade priorizada tem controle e requisito.</a:t>
             </a:r>
           </a:p>
         </p:txBody>

--- a/aulas/aula-04-privacidade-linddun.pptx
+++ b/aulas/aula-04-privacidade-linddun.pptx
@@ -4225,7 +4225,7 @@
                 </a:solidFill>
                 <a:latin typeface="Open Sans"/>
               </a:rPr>
-              <a:t>TADS · Segurança em Sistemas Computacionais</a:t>
+              <a:t>TADS · Segurança de Sistemas Computacionais</a:t>
             </a:r>
           </a:p>
         </p:txBody>

--- a/aulas/aula-04-privacidade-linddun.pptx
+++ b/aulas/aula-04-privacidade-linddun.pptx
@@ -7392,7 +7392,7 @@
                 </a:solidFill>
                 <a:latin typeface="Open Sans"/>
               </a:rPr>
-              <a:t>Linkability</a:t>
+              <a:t>Vinculação (Linking)</a:t>
             </a:r>
           </a:p>
         </p:txBody>
@@ -7617,7 +7617,7 @@
                 </a:solidFill>
                 <a:latin typeface="Open Sans"/>
               </a:rPr>
-              <a:t>Identifiability</a:t>
+              <a:t>Identificabilidade</a:t>
             </a:r>
           </a:p>
         </p:txBody>
@@ -7842,7 +7842,7 @@
                 </a:solidFill>
                 <a:latin typeface="Open Sans"/>
               </a:rPr>
-              <a:t>Non-repudiation</a:t>
+              <a:t>Não-repúdio</a:t>
             </a:r>
           </a:p>
         </p:txBody>
@@ -8067,7 +8067,7 @@
                 </a:solidFill>
                 <a:latin typeface="Open Sans"/>
               </a:rPr>
-              <a:t>Detectability</a:t>
+              <a:t>Detectabilidade</a:t>
             </a:r>
           </a:p>
         </p:txBody>
@@ -8292,7 +8292,7 @@
                 </a:solidFill>
                 <a:latin typeface="Open Sans"/>
               </a:rPr>
-              <a:t>Disclosure</a:t>
+              <a:t>Divulgação de informação</a:t>
             </a:r>
           </a:p>
         </p:txBody>
@@ -8517,7 +8517,7 @@
                 </a:solidFill>
                 <a:latin typeface="Open Sans"/>
               </a:rPr>
-              <a:t>Unaware / Non-compliance</a:t>
+              <a:t>Desconhecimento &amp; Não-conformidade</a:t>
             </a:r>
           </a:p>
         </p:txBody>
@@ -8562,7 +8562,7 @@
                 </a:solidFill>
                 <a:latin typeface="Open Sans"/>
               </a:rPr>
-              <a:t>titular não sabe / o sistema fere a lei</a:t>
+              <a:t>titular não sabe do tratamento, ou o sistema descumpre a lei</a:t>
             </a:r>
           </a:p>
         </p:txBody>
@@ -8939,7 +8939,7 @@
                 </a:solidFill>
                 <a:latin typeface="Open Sans"/>
               </a:rPr>
-              <a:t>Identifiability</a:t>
+              <a:t>Identificabilidade</a:t>
             </a:r>
           </a:p>
         </p:txBody>
@@ -9164,7 +9164,7 @@
                 </a:solidFill>
                 <a:latin typeface="Open Sans"/>
               </a:rPr>
-              <a:t>Disclosure</a:t>
+              <a:t>Divulgação</a:t>
             </a:r>
           </a:p>
         </p:txBody>
@@ -9344,7 +9344,7 @@
                 </a:solidFill>
                 <a:latin typeface="Open Sans"/>
               </a:rPr>
-              <a:t>Cadastro</a:t>
+              <a:t>IDs sequenciais</a:t>
             </a:r>
           </a:p>
         </p:txBody>
@@ -9389,7 +9389,7 @@
                 </a:solidFill>
                 <a:latin typeface="Open Sans"/>
               </a:rPr>
-              <a:t>Unawareness</a:t>
+              <a:t>Vinculação (Linking)</a:t>
             </a:r>
           </a:p>
         </p:txBody>
@@ -9434,7 +9434,7 @@
                 </a:solidFill>
                 <a:latin typeface="Open Sans"/>
               </a:rPr>
-              <a:t>coleta religião sem finalidade -&gt; minimizar</a:t>
+              <a:t>101, 102... -&gt; IDs nao sequenciais (UUID)</a:t>
             </a:r>
           </a:p>
         </p:txBody>
@@ -9614,7 +9614,7 @@
                 </a:solidFill>
                 <a:latin typeface="Open Sans"/>
               </a:rPr>
-              <a:t>Non-compliance</a:t>
+              <a:t>Não-conformidade</a:t>
             </a:r>
           </a:p>
         </p:txBody>
